--- a/docs/발표/HCLT2026_논문정리.pptx
+++ b/docs/발표/HCLT2026_논문정리.pptx
@@ -3546,7 +3546,7 @@
                 <a:cs typeface="NanumGothic"/>
                 <a:ea typeface="NanumGothic"/>
               </a:rPr>
-              <a:t>그래서 손잡이는 어텐션이 아니라 Value에 달려 있다. 그 층의 값을 밀면 준수가 되살아나고, 어텐션을 100배 키워도 준수는 0에 머문다.</a:t>
+              <a:t>그래서 손잡이는 어텐션이 아니라 Value에 달려 있다. 그 층의 값을 밀면 실제 준수율이 0 → 0.81~1.00으로 되살아나고(4모델 중 3), 어텐션 비중을 100배 키워도 준수율은 0.000에 머문다(4모델 중 3 — Llama만 0.190).</a:t>
             </a:r>
           </a:p>
         </p:txBody>
@@ -4725,7 +4725,7 @@
                 <a:cs typeface="NanumGothic"/>
                 <a:ea typeface="NanumGothic"/>
               </a:rPr>
-              <a:t>0.000 → 1.000</a:t>
+              <a:t>0.000 → 1.000 (3모델)</a:t>
             </a:r>
           </a:p>
         </p:txBody>
@@ -4851,7 +4851,7 @@
                 <a:cs typeface="NanumGothic"/>
                 <a:ea typeface="NanumGothic"/>
               </a:rPr>
-              <a:t>어텐션만 키우면 아무 일도 없다</a:t>
+              <a:t>어텐션 비중을 100배 키워도 준수율은 그대로다</a:t>
             </a:r>
           </a:p>
         </p:txBody>
@@ -4892,7 +4892,7 @@
                 <a:cs typeface="NanumGothic"/>
                 <a:ea typeface="NanumGothic"/>
               </a:rPr>
-              <a:t>0.000 그대로</a:t>
+              <a:t>0.000 (3모델)</a:t>
             </a:r>
           </a:p>
         </p:txBody>

--- a/docs/발표/HCLT2026_논문정리.pptx
+++ b/docs/발표/HCLT2026_논문정리.pptx
@@ -7605,7 +7605,7 @@
                 <a:cs typeface="NanumGothic"/>
                 <a:ea typeface="NanumGothic"/>
               </a:rPr>
-              <a:t>구간 하나에 대해 재는 세 가지</a:t>
+              <a:t>두 축을 관측과 인과에서 각각 어떻게 재나</a:t>
             </a:r>
           </a:p>
         </p:txBody>
@@ -7627,7 +7627,7 @@
         <p:spPr>
           <a:xfrm>
             <a:off x="812800" y="2159000"/>
-            <a:ext cx="3496135" cy="406400"/>
+            <a:ext cx="3277626" cy="381000"/>
           </a:xfrm>
           <a:prstGeom prst="rect">
             <a:avLst/>
@@ -7642,8 +7642,8 @@
         </p:nvSpPr>
         <p:spPr>
           <a:xfrm>
-            <a:off x="812800" y="2768600"/>
-            <a:ext cx="1267968" cy="114300"/>
+            <a:off x="812800" y="2743200"/>
+            <a:ext cx="1690624" cy="114300"/>
           </a:xfrm>
           <a:prstGeom prst="rect">
             <a:avLst/>
@@ -7666,7 +7666,7 @@
                 <a:cs typeface="NanumGothic"/>
                 <a:ea typeface="NanumGothic"/>
               </a:rPr>
-              <a:t>지표</a:t>
+              <a:t>축</a:t>
             </a:r>
           </a:p>
         </p:txBody>
@@ -7679,8 +7679,8 @@
         </p:nvSpPr>
         <p:spPr>
           <a:xfrm>
-            <a:off x="2080768" y="2768600"/>
-            <a:ext cx="5283200" cy="114300"/>
+            <a:off x="2503424" y="2743200"/>
+            <a:ext cx="3169920" cy="114300"/>
           </a:xfrm>
           <a:prstGeom prst="rect">
             <a:avLst/>
@@ -7703,7 +7703,7 @@
                 <a:cs typeface="NanumGothic"/>
                 <a:ea typeface="NanumGothic"/>
               </a:rPr>
-              <a:t>무엇</a:t>
+              <a:t>관측 (STEP2·4)</a:t>
             </a:r>
           </a:p>
         </p:txBody>
@@ -7716,7 +7716,44 @@
         </p:nvSpPr>
         <p:spPr>
           <a:xfrm>
-            <a:off x="7363968" y="2768600"/>
+            <a:off x="5673344" y="2743200"/>
+            <a:ext cx="1690624" cy="114300"/>
+          </a:xfrm>
+          <a:prstGeom prst="rect">
+            <a:avLst/>
+          </a:prstGeom>
+          <a:noFill/>
+        </p:spPr>
+        <p:txBody>
+          <a:bodyPr wrap="square" lIns="0" rIns="0" tIns="0" bIns="0" anchor="t">
+            <a:spAutoFit/>
+          </a:bodyPr>
+          <a:lstStyle/>
+          <a:p>
+            <a:pPr algn="l"/>
+            <a:r>
+              <a:rPr sz="850" b="1" spc="110">
+                <a:solidFill>
+                  <a:srgbClr val="6B6B6B"/>
+                </a:solidFill>
+                <a:latin typeface="NanumGothic"/>
+                <a:cs typeface="NanumGothic"/>
+                <a:ea typeface="NanumGothic"/>
+              </a:rPr>
+              <a:t>인과 (STEP3·5) ★</a:t>
+            </a:r>
+          </a:p>
+        </p:txBody>
+      </p:sp>
+      <p:sp>
+        <p:nvSpPr>
+          <p:cNvPr id="14" name="TextBox 13"/>
+          <p:cNvSpPr txBox="1"/>
+          <p:nvPr/>
+        </p:nvSpPr>
+        <p:spPr>
+          <a:xfrm>
+            <a:off x="7363968" y="2743200"/>
             <a:ext cx="4015232" cy="114300"/>
           </a:xfrm>
           <a:prstGeom prst="rect">
@@ -7747,13 +7784,13 @@
       </p:sp>
       <p:sp>
         <p:nvSpPr>
-          <p:cNvPr id="14" name="Rectangle 13"/>
+          <p:cNvPr id="15" name="Rectangle 14"/>
           <p:cNvSpPr/>
           <p:nvPr/>
         </p:nvSpPr>
         <p:spPr>
           <a:xfrm>
-            <a:off x="812800" y="2921000"/>
+            <a:off x="812800" y="2895600"/>
             <a:ext cx="10566400" cy="7620"/>
           </a:xfrm>
           <a:prstGeom prst="rect">
@@ -7791,14 +7828,14 @@
       </p:sp>
       <p:sp>
         <p:nvSpPr>
-          <p:cNvPr id="15" name="TextBox 14"/>
-          <p:cNvSpPr txBox="1"/>
-          <p:nvPr/>
-        </p:nvSpPr>
-        <p:spPr>
-          <a:xfrm>
-            <a:off x="812800" y="3022600"/>
-            <a:ext cx="1102868" cy="330200"/>
+          <p:cNvPr id="16" name="TextBox 15"/>
+          <p:cNvSpPr txBox="1"/>
+          <p:nvPr/>
+        </p:nvSpPr>
+        <p:spPr>
+          <a:xfrm>
+            <a:off x="812800" y="2997200"/>
+            <a:ext cx="1525524" cy="338667"/>
           </a:xfrm>
           <a:prstGeom prst="rect">
             <a:avLst/>
@@ -7825,21 +7862,21 @@
                 <a:cs typeface="NanumGothic"/>
                 <a:ea typeface="NanumGothic"/>
               </a:rPr>
-              <a:t>어텐션</a:t>
-            </a:r>
-          </a:p>
-        </p:txBody>
-      </p:sp>
-      <p:sp>
-        <p:nvSpPr>
-          <p:cNvPr id="16" name="TextBox 15"/>
-          <p:cNvSpPr txBox="1"/>
-          <p:nvPr/>
-        </p:nvSpPr>
-        <p:spPr>
-          <a:xfrm>
-            <a:off x="2080768" y="3022600"/>
-            <a:ext cx="5118100" cy="330200"/>
+              <a:t>축 A — 얼마나 보나 (a)</a:t>
+            </a:r>
+          </a:p>
+        </p:txBody>
+      </p:sp>
+      <p:sp>
+        <p:nvSpPr>
+          <p:cNvPr id="17" name="TextBox 16"/>
+          <p:cNvSpPr txBox="1"/>
+          <p:nvPr/>
+        </p:nvSpPr>
+        <p:spPr>
+          <a:xfrm>
+            <a:off x="2503424" y="2997200"/>
+            <a:ext cx="3004820" cy="338667"/>
           </a:xfrm>
           <a:prstGeom prst="rect">
             <a:avLst/>
@@ -7866,21 +7903,21 @@
                 <a:cs typeface="NanumGothic"/>
                 <a:ea typeface="NanumGothic"/>
               </a:rPr>
-              <a:t>그 구간에 준 주의의 양. 한 행이 1로 합해지므로 곧 비중이다</a:t>
-            </a:r>
-          </a:p>
-        </p:txBody>
-      </p:sp>
-      <p:sp>
-        <p:nvSpPr>
-          <p:cNvPr id="17" name="TextBox 16"/>
-          <p:cNvSpPr txBox="1"/>
-          <p:nvPr/>
-        </p:nvSpPr>
-        <p:spPr>
-          <a:xfrm>
-            <a:off x="7363968" y="3022600"/>
-            <a:ext cx="3850132" cy="330200"/>
+              <a:t>어텐션. 한 행이 1로 합해지므로 곧 비중이다</a:t>
+            </a:r>
+          </a:p>
+        </p:txBody>
+      </p:sp>
+      <p:sp>
+        <p:nvSpPr>
+          <p:cNvPr id="18" name="TextBox 17"/>
+          <p:cNvSpPr txBox="1"/>
+          <p:nvPr/>
+        </p:nvSpPr>
+        <p:spPr>
+          <a:xfrm>
+            <a:off x="5673344" y="2997200"/>
+            <a:ext cx="1525524" cy="338667"/>
           </a:xfrm>
           <a:prstGeom prst="rect">
             <a:avLst/>
@@ -7907,20 +7944,61 @@
                 <a:cs typeface="NanumGothic"/>
                 <a:ea typeface="NanumGothic"/>
               </a:rPr>
-              <a:t>—</a:t>
-            </a:r>
-          </a:p>
-        </p:txBody>
-      </p:sp>
-      <p:sp>
-        <p:nvSpPr>
-          <p:cNvPr id="18" name="Rectangle 17"/>
+              <a:t>Key만 덮어쓴다</a:t>
+            </a:r>
+          </a:p>
+        </p:txBody>
+      </p:sp>
+      <p:sp>
+        <p:nvSpPr>
+          <p:cNvPr id="19" name="TextBox 18"/>
+          <p:cNvSpPr txBox="1"/>
+          <p:nvPr/>
+        </p:nvSpPr>
+        <p:spPr>
+          <a:xfrm>
+            <a:off x="7363968" y="2997200"/>
+            <a:ext cx="3850132" cy="338667"/>
+          </a:xfrm>
+          <a:prstGeom prst="rect">
+            <a:avLst/>
+          </a:prstGeom>
+          <a:noFill/>
+        </p:spPr>
+        <p:txBody>
+          <a:bodyPr wrap="square" lIns="0" rIns="0" tIns="0" bIns="0" anchor="t">
+            <a:spAutoFit/>
+          </a:bodyPr>
+          <a:lstStyle/>
+          <a:p>
+            <a:pPr algn="l">
+              <a:lnSpc>
+                <a:spcPct val="130000"/>
+              </a:lnSpc>
+            </a:pPr>
+            <a:r>
+              <a:rPr sz="1000" b="0">
+                <a:solidFill>
+                  <a:srgbClr val="2E2E2E"/>
+                </a:solidFill>
+                <a:latin typeface="NanumGothic"/>
+                <a:cs typeface="NanumGothic"/>
+                <a:ea typeface="NanumGothic"/>
+              </a:rPr>
+              <a:t>관측은 배치 하나로 못 믿는다 → 자리 통제</a:t>
+            </a:r>
+          </a:p>
+        </p:txBody>
+      </p:sp>
+      <p:sp>
+        <p:nvSpPr>
+          <p:cNvPr id="20" name="Rectangle 19"/>
           <p:cNvSpPr/>
           <p:nvPr/>
         </p:nvSpPr>
         <p:spPr>
           <a:xfrm>
-            <a:off x="812800" y="3289300"/>
+            <a:off x="812800" y="3272367"/>
             <a:ext cx="10566400" cy="7620"/>
           </a:xfrm>
           <a:prstGeom prst="rect">
@@ -7958,14 +8036,14 @@
       </p:sp>
       <p:sp>
         <p:nvSpPr>
-          <p:cNvPr id="19" name="TextBox 18"/>
-          <p:cNvSpPr txBox="1"/>
-          <p:nvPr/>
-        </p:nvSpPr>
-        <p:spPr>
-          <a:xfrm>
-            <a:off x="812800" y="3352800"/>
-            <a:ext cx="1102868" cy="330200"/>
+          <p:cNvPr id="21" name="TextBox 20"/>
+          <p:cNvSpPr txBox="1"/>
+          <p:nvPr/>
+        </p:nvSpPr>
+        <p:spPr>
+          <a:xfrm>
+            <a:off x="812800" y="3335867"/>
+            <a:ext cx="1525524" cy="338667"/>
           </a:xfrm>
           <a:prstGeom prst="rect">
             <a:avLst/>
@@ -7992,21 +8070,21 @@
                 <a:cs typeface="NanumGothic"/>
                 <a:ea typeface="NanumGothic"/>
               </a:rPr>
-              <a:t>‖a·v‖</a:t>
-            </a:r>
-          </a:p>
-        </p:txBody>
-      </p:sp>
-      <p:sp>
-        <p:nvSpPr>
-          <p:cNvPr id="20" name="TextBox 19"/>
-          <p:cNvSpPr txBox="1"/>
-          <p:nvPr/>
-        </p:nvSpPr>
-        <p:spPr>
-          <a:xfrm>
-            <a:off x="2080768" y="3352800"/>
-            <a:ext cx="5118100" cy="330200"/>
+              <a:t>축 B — 무엇이 실려 오나 (v)</a:t>
+            </a:r>
+          </a:p>
+        </p:txBody>
+      </p:sp>
+      <p:sp>
+        <p:nvSpPr>
+          <p:cNvPr id="22" name="TextBox 21"/>
+          <p:cNvSpPr txBox="1"/>
+          <p:nvPr/>
+        </p:nvSpPr>
+        <p:spPr>
+          <a:xfrm>
+            <a:off x="2503424" y="3335867"/>
+            <a:ext cx="3004820" cy="338667"/>
           </a:xfrm>
           <a:prstGeom prst="rect">
             <a:avLst/>
@@ -8033,21 +8111,21 @@
                 <a:cs typeface="NanumGothic"/>
                 <a:ea typeface="NanumGothic"/>
               </a:rPr>
-              <a:t>주의 × 내용 크기 = 기여할 수 있는 크기</a:t>
-            </a:r>
-          </a:p>
-        </p:txBody>
-      </p:sp>
-      <p:sp>
-        <p:nvSpPr>
-          <p:cNvPr id="21" name="TextBox 20"/>
-          <p:cNvSpPr txBox="1"/>
-          <p:nvPr/>
-        </p:nvSpPr>
-        <p:spPr>
-          <a:xfrm>
-            <a:off x="7363968" y="3352800"/>
-            <a:ext cx="3850132" cy="330200"/>
+              <a:t>‖v‖. 주의와 무관한 내용 자체의 크기</a:t>
+            </a:r>
+          </a:p>
+        </p:txBody>
+      </p:sp>
+      <p:sp>
+        <p:nvSpPr>
+          <p:cNvPr id="23" name="TextBox 22"/>
+          <p:cNvSpPr txBox="1"/>
+          <p:nvPr/>
+        </p:nvSpPr>
+        <p:spPr>
+          <a:xfrm>
+            <a:off x="5673344" y="3335867"/>
+            <a:ext cx="1525524" cy="338667"/>
           </a:xfrm>
           <a:prstGeom prst="rect">
             <a:avLst/>
@@ -8074,20 +8152,61 @@
                 <a:cs typeface="NanumGothic"/>
                 <a:ea typeface="NanumGothic"/>
               </a:rPr>
-              <a:t>상한이다. 벡터 상쇄를 무시했고 W_O 이전 값</a:t>
-            </a:r>
-          </a:p>
-        </p:txBody>
-      </p:sp>
-      <p:sp>
-        <p:nvSpPr>
-          <p:cNvPr id="22" name="Rectangle 21"/>
+              <a:t>Value만 덮어쓴다</a:t>
+            </a:r>
+          </a:p>
+        </p:txBody>
+      </p:sp>
+      <p:sp>
+        <p:nvSpPr>
+          <p:cNvPr id="24" name="TextBox 23"/>
+          <p:cNvSpPr txBox="1"/>
+          <p:nvPr/>
+        </p:nvSpPr>
+        <p:spPr>
+          <a:xfrm>
+            <a:off x="7363968" y="3335867"/>
+            <a:ext cx="3850132" cy="338667"/>
+          </a:xfrm>
+          <a:prstGeom prst="rect">
+            <a:avLst/>
+          </a:prstGeom>
+          <a:noFill/>
+        </p:spPr>
+        <p:txBody>
+          <a:bodyPr wrap="square" lIns="0" rIns="0" tIns="0" bIns="0" anchor="t">
+            <a:spAutoFit/>
+          </a:bodyPr>
+          <a:lstStyle/>
+          <a:p>
+            <a:pPr algn="l">
+              <a:lnSpc>
+                <a:spcPct val="130000"/>
+              </a:lnSpc>
+            </a:pPr>
+            <a:r>
+              <a:rPr sz="1000" b="0">
+                <a:solidFill>
+                  <a:srgbClr val="2E2E2E"/>
+                </a:solidFill>
+                <a:latin typeface="NanumGothic"/>
+                <a:cs typeface="NanumGothic"/>
+                <a:ea typeface="NanumGothic"/>
+              </a:rPr>
+              <a:t>이미 토큰당 평균이라 다시 나누지 않는다</a:t>
+            </a:r>
+          </a:p>
+        </p:txBody>
+      </p:sp>
+      <p:sp>
+        <p:nvSpPr>
+          <p:cNvPr id="25" name="Rectangle 24"/>
           <p:cNvSpPr/>
           <p:nvPr/>
         </p:nvSpPr>
         <p:spPr>
           <a:xfrm>
-            <a:off x="812800" y="3619500"/>
+            <a:off x="812800" y="3611033"/>
             <a:ext cx="10566400" cy="7620"/>
           </a:xfrm>
           <a:prstGeom prst="rect">
@@ -8125,14 +8244,14 @@
       </p:sp>
       <p:sp>
         <p:nvSpPr>
-          <p:cNvPr id="23" name="TextBox 22"/>
-          <p:cNvSpPr txBox="1"/>
-          <p:nvPr/>
-        </p:nvSpPr>
-        <p:spPr>
-          <a:xfrm>
-            <a:off x="812800" y="3683000"/>
-            <a:ext cx="1102868" cy="330200"/>
+          <p:cNvPr id="26" name="TextBox 25"/>
+          <p:cNvSpPr txBox="1"/>
+          <p:nvPr/>
+        </p:nvSpPr>
+        <p:spPr>
+          <a:xfrm>
+            <a:off x="812800" y="3674533"/>
+            <a:ext cx="1525524" cy="338667"/>
           </a:xfrm>
           <a:prstGeom prst="rect">
             <a:avLst/>
@@ -8159,21 +8278,21 @@
                 <a:cs typeface="NanumGothic"/>
                 <a:ea typeface="NanumGothic"/>
               </a:rPr>
-              <a:t>‖v‖</a:t>
-            </a:r>
-          </a:p>
-        </p:txBody>
-      </p:sp>
-      <p:sp>
-        <p:nvSpPr>
-          <p:cNvPr id="24" name="TextBox 23"/>
-          <p:cNvSpPr txBox="1"/>
-          <p:nvPr/>
-        </p:nvSpPr>
-        <p:spPr>
-          <a:xfrm>
-            <a:off x="2080768" y="3683000"/>
-            <a:ext cx="5118100" cy="330200"/>
+              <a:t>(보조) 두 축의 곱</a:t>
+            </a:r>
+          </a:p>
+        </p:txBody>
+      </p:sp>
+      <p:sp>
+        <p:nvSpPr>
+          <p:cNvPr id="27" name="TextBox 26"/>
+          <p:cNvSpPr txBox="1"/>
+          <p:nvPr/>
+        </p:nvSpPr>
+        <p:spPr>
+          <a:xfrm>
+            <a:off x="2503424" y="3674533"/>
+            <a:ext cx="3004820" cy="338667"/>
           </a:xfrm>
           <a:prstGeom prst="rect">
             <a:avLst/>
@@ -8200,21 +8319,21 @@
                 <a:cs typeface="NanumGothic"/>
                 <a:ea typeface="NanumGothic"/>
               </a:rPr>
-              <a:t>내용 자체의 크기. 주의와 무관하다</a:t>
-            </a:r>
-          </a:p>
-        </p:txBody>
-      </p:sp>
-      <p:sp>
-        <p:nvSpPr>
-          <p:cNvPr id="25" name="TextBox 24"/>
-          <p:cNvSpPr txBox="1"/>
-          <p:nvPr/>
-        </p:nvSpPr>
-        <p:spPr>
-          <a:xfrm>
-            <a:off x="7363968" y="3683000"/>
-            <a:ext cx="3850132" cy="330200"/>
+              <a:t>‖a·v‖ = Σ a·‖v‖. Kobayashi et al. (2020) 계열</a:t>
+            </a:r>
+          </a:p>
+        </p:txBody>
+      </p:sp>
+      <p:sp>
+        <p:nvSpPr>
+          <p:cNvPr id="28" name="TextBox 27"/>
+          <p:cNvSpPr txBox="1"/>
+          <p:nvPr/>
+        </p:nvSpPr>
+        <p:spPr>
+          <a:xfrm>
+            <a:off x="5673344" y="3674533"/>
+            <a:ext cx="1525524" cy="338667"/>
           </a:xfrm>
           <a:prstGeom prst="rect">
             <a:avLst/>
@@ -8241,14 +8360,55 @@
                 <a:cs typeface="NanumGothic"/>
                 <a:ea typeface="NanumGothic"/>
               </a:rPr>
-              <a:t>이미 토큰당 평균이라 다시 나누지 않는다</a:t>
-            </a:r>
-          </a:p>
-        </p:txBody>
-      </p:sp>
-      <p:sp>
-        <p:nvSpPr>
-          <p:cNvPr id="26" name="Rounded Rectangle 25"/>
+              <a:t>쓰지 않는다</a:t>
+            </a:r>
+          </a:p>
+        </p:txBody>
+      </p:sp>
+      <p:sp>
+        <p:nvSpPr>
+          <p:cNvPr id="29" name="TextBox 28"/>
+          <p:cNvSpPr txBox="1"/>
+          <p:nvPr/>
+        </p:nvSpPr>
+        <p:spPr>
+          <a:xfrm>
+            <a:off x="7363968" y="3674533"/>
+            <a:ext cx="3850132" cy="338667"/>
+          </a:xfrm>
+          <a:prstGeom prst="rect">
+            <a:avLst/>
+          </a:prstGeom>
+          <a:noFill/>
+        </p:spPr>
+        <p:txBody>
+          <a:bodyPr wrap="square" lIns="0" rIns="0" tIns="0" bIns="0" anchor="t">
+            <a:spAutoFit/>
+          </a:bodyPr>
+          <a:lstStyle/>
+          <a:p>
+            <a:pPr algn="l">
+              <a:lnSpc>
+                <a:spcPct val="130000"/>
+              </a:lnSpc>
+            </a:pPr>
+            <a:r>
+              <a:rPr sz="1000" b="0">
+                <a:solidFill>
+                  <a:srgbClr val="2E2E2E"/>
+                </a:solidFill>
+                <a:latin typeface="NanumGothic"/>
+                <a:cs typeface="NanumGothic"/>
+                <a:ea typeface="NanumGothic"/>
+              </a:rPr>
+              <a:t>W_O 이전 값이라 상한 대리치. 이 지표에 근거한 관측은 철회됐다</a:t>
+            </a:r>
+          </a:p>
+        </p:txBody>
+      </p:sp>
+      <p:sp>
+        <p:nvSpPr>
+          <p:cNvPr id="30" name="Rounded Rectangle 29"/>
           <p:cNvSpPr/>
           <p:nvPr/>
         </p:nvSpPr>
@@ -8294,7 +8454,7 @@
       </p:sp>
       <p:sp>
         <p:nvSpPr>
-          <p:cNvPr id="27" name="TextBox 26"/>
+          <p:cNvPr id="31" name="TextBox 30"/>
           <p:cNvSpPr txBox="1"/>
           <p:nvPr/>
         </p:nvSpPr>
@@ -8331,7 +8491,7 @@
       </p:sp>
       <p:sp>
         <p:nvSpPr>
-          <p:cNvPr id="28" name="TextBox 27"/>
+          <p:cNvPr id="32" name="TextBox 31"/>
           <p:cNvSpPr txBox="1"/>
           <p:nvPr/>
         </p:nvSpPr>
@@ -8372,7 +8532,7 @@
       </p:sp>
       <p:sp>
         <p:nvSpPr>
-          <p:cNvPr id="29" name="TextBox 28"/>
+          <p:cNvPr id="33" name="TextBox 32"/>
           <p:cNvSpPr txBox="1"/>
           <p:nvPr/>
         </p:nvSpPr>
@@ -8409,7 +8569,7 @@
       </p:sp>
       <p:sp>
         <p:nvSpPr>
-          <p:cNvPr id="30" name="TextBox 29"/>
+          <p:cNvPr id="34" name="TextBox 33"/>
           <p:cNvSpPr txBox="1"/>
           <p:nvPr/>
         </p:nvSpPr>
@@ -8446,7 +8606,7 @@
       </p:sp>
       <p:sp>
         <p:nvSpPr>
-          <p:cNvPr id="31" name="TextBox 30"/>
+          <p:cNvPr id="35" name="TextBox 34"/>
           <p:cNvSpPr txBox="1"/>
           <p:nvPr/>
         </p:nvSpPr>
@@ -8483,7 +8643,7 @@
       </p:sp>
       <p:sp>
         <p:nvSpPr>
-          <p:cNvPr id="32" name="TextBox 31"/>
+          <p:cNvPr id="36" name="TextBox 35"/>
           <p:cNvSpPr txBox="1"/>
           <p:nvPr/>
         </p:nvSpPr>
@@ -8520,7 +8680,7 @@
       </p:sp>
       <p:sp>
         <p:nvSpPr>
-          <p:cNvPr id="33" name="Rectangle 32"/>
+          <p:cNvPr id="37" name="Rectangle 36"/>
           <p:cNvSpPr/>
           <p:nvPr/>
         </p:nvSpPr>
@@ -8564,7 +8724,7 @@
       </p:sp>
       <p:sp>
         <p:nvSpPr>
-          <p:cNvPr id="34" name="TextBox 33"/>
+          <p:cNvPr id="38" name="TextBox 37"/>
           <p:cNvSpPr txBox="1"/>
           <p:nvPr/>
         </p:nvSpPr>
@@ -8605,7 +8765,7 @@
       </p:sp>
       <p:sp>
         <p:nvSpPr>
-          <p:cNvPr id="35" name="TextBox 34"/>
+          <p:cNvPr id="39" name="TextBox 38"/>
           <p:cNvSpPr txBox="1"/>
           <p:nvPr/>
         </p:nvSpPr>
@@ -8646,7 +8806,7 @@
       </p:sp>
       <p:sp>
         <p:nvSpPr>
-          <p:cNvPr id="36" name="TextBox 35"/>
+          <p:cNvPr id="40" name="TextBox 39"/>
           <p:cNvSpPr txBox="1"/>
           <p:nvPr/>
         </p:nvSpPr>
@@ -8687,7 +8847,7 @@
       </p:sp>
       <p:sp>
         <p:nvSpPr>
-          <p:cNvPr id="37" name="TextBox 36"/>
+          <p:cNvPr id="41" name="TextBox 40"/>
           <p:cNvSpPr txBox="1"/>
           <p:nvPr/>
         </p:nvSpPr>
@@ -8728,7 +8888,7 @@
       </p:sp>
       <p:sp>
         <p:nvSpPr>
-          <p:cNvPr id="38" name="Rectangle 37"/>
+          <p:cNvPr id="42" name="Rectangle 41"/>
           <p:cNvSpPr/>
           <p:nvPr/>
         </p:nvSpPr>
@@ -8772,7 +8932,7 @@
       </p:sp>
       <p:sp>
         <p:nvSpPr>
-          <p:cNvPr id="39" name="TextBox 38"/>
+          <p:cNvPr id="43" name="TextBox 42"/>
           <p:cNvSpPr txBox="1"/>
           <p:nvPr/>
         </p:nvSpPr>
@@ -8813,7 +8973,7 @@
       </p:sp>
       <p:sp>
         <p:nvSpPr>
-          <p:cNvPr id="40" name="TextBox 39"/>
+          <p:cNvPr id="44" name="TextBox 43"/>
           <p:cNvSpPr txBox="1"/>
           <p:nvPr/>
         </p:nvSpPr>
@@ -8854,7 +9014,7 @@
       </p:sp>
       <p:sp>
         <p:nvSpPr>
-          <p:cNvPr id="41" name="TextBox 40"/>
+          <p:cNvPr id="45" name="TextBox 44"/>
           <p:cNvSpPr txBox="1"/>
           <p:nvPr/>
         </p:nvSpPr>
@@ -8895,7 +9055,7 @@
       </p:sp>
       <p:sp>
         <p:nvSpPr>
-          <p:cNvPr id="42" name="TextBox 41"/>
+          <p:cNvPr id="46" name="TextBox 45"/>
           <p:cNvSpPr txBox="1"/>
           <p:nvPr/>
         </p:nvSpPr>
@@ -8936,7 +9096,7 @@
       </p:sp>
       <p:sp>
         <p:nvSpPr>
-          <p:cNvPr id="43" name="Rectangle 42"/>
+          <p:cNvPr id="47" name="Rectangle 46"/>
           <p:cNvSpPr/>
           <p:nvPr/>
         </p:nvSpPr>
@@ -8980,7 +9140,7 @@
       </p:sp>
       <p:sp>
         <p:nvSpPr>
-          <p:cNvPr id="44" name="TextBox 43"/>
+          <p:cNvPr id="48" name="TextBox 47"/>
           <p:cNvSpPr txBox="1"/>
           <p:nvPr/>
         </p:nvSpPr>
@@ -9021,7 +9181,7 @@
       </p:sp>
       <p:sp>
         <p:nvSpPr>
-          <p:cNvPr id="45" name="TextBox 44"/>
+          <p:cNvPr id="49" name="TextBox 48"/>
           <p:cNvSpPr txBox="1"/>
           <p:nvPr/>
         </p:nvSpPr>
@@ -9062,7 +9222,7 @@
       </p:sp>
       <p:sp>
         <p:nvSpPr>
-          <p:cNvPr id="46" name="TextBox 45"/>
+          <p:cNvPr id="50" name="TextBox 49"/>
           <p:cNvSpPr txBox="1"/>
           <p:nvPr/>
         </p:nvSpPr>
@@ -9103,7 +9263,7 @@
       </p:sp>
       <p:sp>
         <p:nvSpPr>
-          <p:cNvPr id="47" name="TextBox 46"/>
+          <p:cNvPr id="51" name="TextBox 50"/>
           <p:cNvSpPr txBox="1"/>
           <p:nvPr/>
         </p:nvSpPr>
@@ -9144,7 +9304,7 @@
       </p:sp>
       <p:sp>
         <p:nvSpPr>
-          <p:cNvPr id="48" name="Rounded Rectangle 47"/>
+          <p:cNvPr id="52" name="Rounded Rectangle 51"/>
           <p:cNvSpPr/>
           <p:nvPr/>
         </p:nvSpPr>
@@ -9190,7 +9350,7 @@
       </p:sp>
       <p:sp>
         <p:nvSpPr>
-          <p:cNvPr id="49" name="TextBox 48"/>
+          <p:cNvPr id="53" name="TextBox 52"/>
           <p:cNvSpPr txBox="1"/>
           <p:nvPr/>
         </p:nvSpPr>
@@ -9220,14 +9380,55 @@
                 <a:cs typeface="NanumGothic"/>
                 <a:ea typeface="NanumGothic"/>
               </a:rPr>
-              <a:t>‖A·V‖를 “실제 기여량”이라 쓰면 과장이다</a:t>
+              <a:t>‖A·V‖는 왜 보조로 내렸나</a:t>
+            </a:r>
+          </a:p>
+        </p:txBody>
+      </p:sp>
+      <p:sp>
+        <p:nvSpPr>
+          <p:cNvPr id="54" name="TextBox 53"/>
+          <p:cNvSpPr txBox="1"/>
+          <p:nvPr/>
+        </p:nvSpPr>
+        <p:spPr>
+          <a:xfrm>
+            <a:off x="6350000" y="5868765"/>
+            <a:ext cx="5029200" cy="208185"/>
+          </a:xfrm>
+          <a:prstGeom prst="rect">
+            <a:avLst/>
+          </a:prstGeom>
+          <a:noFill/>
+        </p:spPr>
+        <p:txBody>
+          <a:bodyPr wrap="square" lIns="0" rIns="0" tIns="0" bIns="0" anchor="b">
+            <a:spAutoFit/>
+          </a:bodyPr>
+          <a:lstStyle/>
+          <a:p>
+            <a:pPr algn="l">
+              <a:lnSpc>
+                <a:spcPct val="125000"/>
+              </a:lnSpc>
+            </a:pPr>
+            <a:r>
+              <a:rPr sz="950" b="0">
+                <a:solidFill>
+                  <a:srgbClr val="6B6B6B"/>
+                </a:solidFill>
+                <a:latin typeface="NanumGothic"/>
+                <a:cs typeface="NanumGothic"/>
+                <a:ea typeface="NanumGothic"/>
+              </a:rPr>
+              <a:t>살아 있는 주장은 전부 되돌림률(인과)과 생성 준수율(행동) 위에 서 있다.</a:t>
             </a:r>
           </a:p>
         </p:txBody>
       </p:sp>
       <p:pic>
         <p:nvPicPr>
-          <p:cNvPr id="50" name="Picture 49" descr="eq_avnorm.png"/>
+          <p:cNvPr id="55" name="Picture 54" descr="eq_avnorm.png"/>
           <p:cNvPicPr>
             <a:picLocks noChangeAspect="1"/>
           </p:cNvPicPr>
@@ -9242,7 +9443,7 @@
         <p:spPr>
           <a:xfrm>
             <a:off x="6350000" y="4724400"/>
-            <a:ext cx="1837729" cy="368300"/>
+            <a:ext cx="1710989" cy="342900"/>
           </a:xfrm>
           <a:prstGeom prst="rect">
             <a:avLst/>
@@ -9251,13 +9452,13 @@
       </p:pic>
       <p:sp>
         <p:nvSpPr>
-          <p:cNvPr id="51" name="TextBox 50"/>
-          <p:cNvSpPr txBox="1"/>
-          <p:nvPr/>
-        </p:nvSpPr>
-        <p:spPr>
-          <a:xfrm>
-            <a:off x="6350000" y="5207000"/>
+          <p:cNvPr id="56" name="TextBox 55"/>
+          <p:cNvSpPr txBox="1"/>
+          <p:nvPr/>
+        </p:nvSpPr>
+        <p:spPr>
+          <a:xfrm>
+            <a:off x="6350000" y="5181600"/>
             <a:ext cx="5029200" cy="692662"/>
           </a:xfrm>
           <a:prstGeom prst="rect">
@@ -9285,7 +9486,48 @@
                 <a:cs typeface="NanumGothic"/>
                 <a:ea typeface="NanumGothic"/>
               </a:rPr>
-              <a:t>왼쪽이 우리가 재는 값, 오른쪽이 실제로 잔차에 더해지는 벡터의 크기다. 부등호가 있다는 것은 벡터끼리 방향이 상쇄되는 것을 우리가 무시했다는 뜻이다. 게다가 출력 사영 W_O를 통과하기 전 값이다. 논문에는 “기여 크기의 상한 대리치”로만 쓴다.</a:t>
+              <a:t>어텐션 가중치와 값 노름의 곱으로 구간 기여를 근사하는 방식은 Kobayashi et al.(2020)이 제안했다. 다만 그쪽은 출력 사영 W_O를 노름 안에 넣는다. 우리 값은 W_O 이전이라 같은 지표가 아니라 **상한 대리치**다.</a:t>
+            </a:r>
+          </a:p>
+        </p:txBody>
+      </p:sp>
+      <p:sp>
+        <p:nvSpPr>
+          <p:cNvPr id="57" name="TextBox 56"/>
+          <p:cNvSpPr txBox="1"/>
+          <p:nvPr/>
+        </p:nvSpPr>
+        <p:spPr>
+          <a:xfrm>
+            <a:off x="6350000" y="5892800"/>
+            <a:ext cx="5029200" cy="692662"/>
+          </a:xfrm>
+          <a:prstGeom prst="rect">
+            <a:avLst/>
+          </a:prstGeom>
+          <a:noFill/>
+        </p:spPr>
+        <p:txBody>
+          <a:bodyPr wrap="square" lIns="0" rIns="0" tIns="0" bIns="0" anchor="t">
+            <a:spAutoFit/>
+          </a:bodyPr>
+          <a:lstStyle/>
+          <a:p>
+            <a:pPr algn="l">
+              <a:lnSpc>
+                <a:spcPct val="135000"/>
+              </a:lnSpc>
+            </a:pPr>
+            <a:r>
+              <a:rPr sz="1050" b="0">
+                <a:solidFill>
+                  <a:srgbClr val="6B6B6B"/>
+                </a:solidFill>
+                <a:latin typeface="NanumGothic"/>
+                <a:cs typeface="NanumGothic"/>
+                <a:ea typeface="NanumGothic"/>
+              </a:rPr>
+              <a:t>그리고 이 지표는 어텐션을 곱하므로 자리 교란을 그대로 받는다 — 자리 통제 후 Qwen 11%·Llama 3%만 남고 DeepSeek은 음수로 뒤집혔다. 그래서 이 지표에 근거한 관측은 철회했고, 논문에서는 보조 서술로만 쓴다.</a:t>
             </a:r>
           </a:p>
         </p:txBody>
@@ -51466,7 +51708,7 @@
         <p:spPr>
           <a:xfrm>
             <a:off x="6350000" y="2184400"/>
-            <a:ext cx="5029200" cy="952500"/>
+            <a:ext cx="5029200" cy="762000"/>
           </a:xfrm>
           <a:prstGeom prst="rect">
             <a:avLst/>
@@ -51512,54 +51754,13 @@
                 <a:ea typeface="NanumGothic"/>
               </a:rPr>
               <a:t>실려 오는 내용(Value)은 다르다.</a:t>
-            </a:r>
-          </a:p>
-        </p:txBody>
-      </p:sp>
-      <p:sp>
-        <p:nvSpPr>
-          <p:cNvPr id="15" name="TextBox 14"/>
-          <p:cNvSpPr txBox="1"/>
-          <p:nvPr/>
-        </p:nvSpPr>
-        <p:spPr>
-          <a:xfrm>
-            <a:off x="6350000" y="3136900"/>
-            <a:ext cx="5029200" cy="723831"/>
-          </a:xfrm>
-          <a:prstGeom prst="rect">
-            <a:avLst/>
-          </a:prstGeom>
-          <a:noFill/>
-        </p:spPr>
-        <p:txBody>
-          <a:bodyPr wrap="square" lIns="0" rIns="0" tIns="0" bIns="0" anchor="t">
-            <a:spAutoFit/>
-          </a:bodyPr>
-          <a:lstStyle/>
-          <a:p>
-            <a:pPr algn="l">
-              <a:lnSpc>
-                <a:spcPct val="135000"/>
-              </a:lnSpc>
-            </a:pPr>
-            <a:r>
-              <a:rPr sz="1100" b="0">
-                <a:solidFill>
-                  <a:srgbClr val="2E2E2E"/>
-                </a:solidFill>
-                <a:latin typeface="NanumGothic"/>
-                <a:cs typeface="NanumGothic"/>
-                <a:ea typeface="NanumGothic"/>
-              </a:rPr>
-              <a:t>트랜스포머에서 한 구간이 다음 층에 미치는 영향은 「얼마나 보나(a)」와 「무엇을 실어 오나(v)」의 곱이다. 통념은 앞쪽만 건드린다. 만약 문제가 뒤쪽에 있다면 어텐션을 아무리 키워도 소용이 없다.</a:t>
             </a:r>
           </a:p>
         </p:txBody>
       </p:sp>
       <p:pic>
         <p:nvPicPr>
-          <p:cNvPr id="16" name="Picture 15" descr="eq_output.png"/>
+          <p:cNvPr id="15" name="Picture 14" descr="eq_output.png"/>
           <p:cNvPicPr>
             <a:picLocks noChangeAspect="1"/>
           </p:cNvPicPr>
@@ -51573,14 +51774,96 @@
         </p:blipFill>
         <p:spPr>
           <a:xfrm>
-            <a:off x="6350000" y="4025900"/>
-            <a:ext cx="2405891" cy="368300"/>
+            <a:off x="6350000" y="3009900"/>
+            <a:ext cx="2239968" cy="342900"/>
           </a:xfrm>
           <a:prstGeom prst="rect">
             <a:avLst/>
           </a:prstGeom>
         </p:spPr>
       </p:pic>
+      <p:sp>
+        <p:nvSpPr>
+          <p:cNvPr id="16" name="TextBox 15"/>
+          <p:cNvSpPr txBox="1"/>
+          <p:nvPr/>
+        </p:nvSpPr>
+        <p:spPr>
+          <a:xfrm>
+            <a:off x="6350000" y="3467100"/>
+            <a:ext cx="5029200" cy="723831"/>
+          </a:xfrm>
+          <a:prstGeom prst="rect">
+            <a:avLst/>
+          </a:prstGeom>
+          <a:noFill/>
+        </p:spPr>
+        <p:txBody>
+          <a:bodyPr wrap="square" lIns="0" rIns="0" tIns="0" bIns="0" anchor="t">
+            <a:spAutoFit/>
+          </a:bodyPr>
+          <a:lstStyle/>
+          <a:p>
+            <a:pPr algn="l">
+              <a:lnSpc>
+                <a:spcPct val="135000"/>
+              </a:lnSpc>
+            </a:pPr>
+            <a:r>
+              <a:rPr sz="1100" b="0">
+                <a:solidFill>
+                  <a:srgbClr val="2E2E2E"/>
+                </a:solidFill>
+                <a:latin typeface="NanumGothic"/>
+                <a:cs typeface="NanumGothic"/>
+                <a:ea typeface="NanumGothic"/>
+              </a:rPr>
+              <a:t>한 구간이 다음 층에 미치는 것은 「얼마나 보나(a)」와 「무엇을 실어 오나(v)」 두 요소로 정해진다. 통념과 기존 처방은 **a만** 건드린다. 문제가 v에 있다면 a를 아무리 키워도 소용이 없다.</a:t>
+            </a:r>
+          </a:p>
+        </p:txBody>
+      </p:sp>
+      <p:sp>
+        <p:nvSpPr>
+          <p:cNvPr id="17" name="TextBox 16"/>
+          <p:cNvSpPr txBox="1"/>
+          <p:nvPr/>
+        </p:nvSpPr>
+        <p:spPr>
+          <a:xfrm>
+            <a:off x="6350000" y="4000500"/>
+            <a:ext cx="5029200" cy="723831"/>
+          </a:xfrm>
+          <a:prstGeom prst="rect">
+            <a:avLst/>
+          </a:prstGeom>
+          <a:noFill/>
+        </p:spPr>
+        <p:txBody>
+          <a:bodyPr wrap="square" lIns="0" rIns="0" tIns="0" bIns="0" anchor="t">
+            <a:spAutoFit/>
+          </a:bodyPr>
+          <a:lstStyle/>
+          <a:p>
+            <a:pPr algn="l">
+              <a:lnSpc>
+                <a:spcPct val="135000"/>
+              </a:lnSpc>
+            </a:pPr>
+            <a:r>
+              <a:rPr sz="1100" b="0">
+                <a:solidFill>
+                  <a:srgbClr val="6B6B6B"/>
+                </a:solidFill>
+                <a:latin typeface="NanumGothic"/>
+                <a:cs typeface="NanumGothic"/>
+                <a:ea typeface="NanumGothic"/>
+              </a:rPr>
+              <a:t>가정으로 두지 않는다. 캐시의 Key만 덮으면 a가, Value만 덮으면 v가 바뀐다 — 두 축을 따로 끊어 어느 쪽이 행동을 움직이는지 직접 잰다(step3·5). 그리고 어텐션을 키우는 처방(Spotlight)은 재구현해 같은 자로 견준다(step6).</a:t>
+            </a:r>
+          </a:p>
+        </p:txBody>
+      </p:sp>
     </p:spTree>
   </p:cSld>
   <p:clrMapOvr>

--- a/docs/발표/HCLT2026_논문정리.pptx
+++ b/docs/발표/HCLT2026_논문정리.pptx
@@ -5317,7 +5317,7 @@
         <p:spPr>
           <a:xfrm>
             <a:off x="812800" y="2679700"/>
-            <a:ext cx="5220701" cy="393700"/>
+            <a:ext cx="5012104" cy="393700"/>
           </a:xfrm>
           <a:prstGeom prst="rect">
             <a:avLst/>
@@ -5356,7 +5356,7 @@
                 <a:cs typeface="NanumGothic"/>
                 <a:ea typeface="NanumGothic"/>
               </a:rPr>
-              <a:t>x  프롬프트   y  후보 이름   y_k  그 이름의 k번째 토큰</a:t>
+              <a:t>x  프롬프트   y⁺  준수 후보   y⁻  위반 후보   y_k  k번째 토큰</a:t>
             </a:r>
           </a:p>
         </p:txBody>
@@ -6269,7 +6269,7 @@
         <p:spPr>
           <a:xfrm>
             <a:off x="812800" y="2159000"/>
-            <a:ext cx="2042678" cy="482600"/>
+            <a:ext cx="1436583" cy="457200"/>
           </a:xfrm>
           <a:prstGeom prst="rect">
             <a:avLst/>
@@ -6284,8 +6284,8 @@
         </p:nvSpPr>
         <p:spPr>
           <a:xfrm>
-            <a:off x="812800" y="2819400"/>
-            <a:ext cx="1207008" cy="114300"/>
+            <a:off x="812800" y="2794000"/>
+            <a:ext cx="603504" cy="114300"/>
           </a:xfrm>
           <a:prstGeom prst="rect">
             <a:avLst/>
@@ -6321,8 +6321,8 @@
         </p:nvSpPr>
         <p:spPr>
           <a:xfrm>
-            <a:off x="2019808" y="2819400"/>
-            <a:ext cx="1810512" cy="114300"/>
+            <a:off x="1416304" y="2794000"/>
+            <a:ext cx="3118104" cy="114300"/>
           </a:xfrm>
           <a:prstGeom prst="rect">
             <a:avLst/>
@@ -6345,7 +6345,7 @@
                 <a:cs typeface="NanumGothic"/>
                 <a:ea typeface="NanumGothic"/>
               </a:rPr>
-              <a:t>프롬프트</a:t>
+              <a:t>어떤 프롬프트인가</a:t>
             </a:r>
           </a:p>
         </p:txBody>
@@ -6358,8 +6358,8 @@
         </p:nvSpPr>
         <p:spPr>
           <a:xfrm>
-            <a:off x="3830320" y="2819400"/>
-            <a:ext cx="2011680" cy="114300"/>
+            <a:off x="4534408" y="2794000"/>
+            <a:ext cx="1307592" cy="114300"/>
           </a:xfrm>
           <a:prstGeom prst="rect">
             <a:avLst/>
@@ -6382,7 +6382,7 @@
                 <a:cs typeface="NanumGothic"/>
                 <a:ea typeface="NanumGothic"/>
               </a:rPr>
-              <a:t>뜻</a:t>
+              <a:t>부르는 이름</a:t>
             </a:r>
           </a:p>
         </p:txBody>
@@ -6395,7 +6395,7 @@
         </p:nvSpPr>
         <p:spPr>
           <a:xfrm>
-            <a:off x="812800" y="2971800"/>
+            <a:off x="812800" y="2946400"/>
             <a:ext cx="5029200" cy="7620"/>
           </a:xfrm>
           <a:prstGeom prst="rect">
@@ -6439,8 +6439,8 @@
         </p:nvSpPr>
         <p:spPr>
           <a:xfrm>
-            <a:off x="812800" y="3073400"/>
-            <a:ext cx="1041908" cy="325967"/>
+            <a:off x="812800" y="3048000"/>
+            <a:ext cx="438404" cy="325967"/>
           </a:xfrm>
           <a:prstGeom prst="rect">
             <a:avLst/>
@@ -6467,7 +6467,7 @@
                 <a:cs typeface="NanumGothic"/>
                 <a:ea typeface="NanumGothic"/>
               </a:rPr>
-              <a:t>S(x^viol)</a:t>
+              <a:t>S₀</a:t>
             </a:r>
           </a:p>
         </p:txBody>
@@ -6480,8 +6480,8 @@
         </p:nvSpPr>
         <p:spPr>
           <a:xfrm>
-            <a:off x="2019808" y="3073400"/>
-            <a:ext cx="1645412" cy="325967"/>
+            <a:off x="1416304" y="3048000"/>
+            <a:ext cx="2953004" cy="325967"/>
           </a:xfrm>
           <a:prstGeom prst="rect">
             <a:avLst/>
@@ -6508,7 +6508,7 @@
                 <a:cs typeface="NanumGothic"/>
                 <a:ea typeface="NanumGothic"/>
               </a:rPr>
-              <a:t>문맥에 위반 6개</a:t>
+              <a:t>문맥에 위반 6개 — 아무것도 안 건드린 상태</a:t>
             </a:r>
           </a:p>
         </p:txBody>
@@ -6521,8 +6521,8 @@
         </p:nvSpPr>
         <p:spPr>
           <a:xfrm>
-            <a:off x="3830320" y="3073400"/>
-            <a:ext cx="1846580" cy="325967"/>
+            <a:off x="4534408" y="3048000"/>
+            <a:ext cx="1142492" cy="325967"/>
           </a:xfrm>
           <a:prstGeom prst="rect">
             <a:avLst/>
@@ -6549,7 +6549,7 @@
                 <a:cs typeface="NanumGothic"/>
                 <a:ea typeface="NanumGothic"/>
               </a:rPr>
-              <a:t>기준 — 개입 없음</a:t>
+              <a:t>기준</a:t>
             </a:r>
           </a:p>
         </p:txBody>
@@ -6562,7 +6562,7 @@
         </p:nvSpPr>
         <p:spPr>
           <a:xfrm>
-            <a:off x="812800" y="3335867"/>
+            <a:off x="812800" y="3310467"/>
             <a:ext cx="5029200" cy="7620"/>
           </a:xfrm>
           <a:prstGeom prst="rect">
@@ -6606,8 +6606,8 @@
         </p:nvSpPr>
         <p:spPr>
           <a:xfrm>
-            <a:off x="812800" y="3399367"/>
-            <a:ext cx="1041908" cy="325967"/>
+            <a:off x="812800" y="3373967"/>
+            <a:ext cx="438404" cy="325967"/>
           </a:xfrm>
           <a:prstGeom prst="rect">
             <a:avLst/>
@@ -6634,7 +6634,7 @@
                 <a:cs typeface="NanumGothic"/>
                 <a:ea typeface="NanumGothic"/>
               </a:rPr>
-              <a:t>S(x^clean)</a:t>
+              <a:t>S₁</a:t>
             </a:r>
           </a:p>
         </p:txBody>
@@ -6647,8 +6647,8 @@
         </p:nvSpPr>
         <p:spPr>
           <a:xfrm>
-            <a:off x="2019808" y="3399367"/>
-            <a:ext cx="1645412" cy="325967"/>
+            <a:off x="1416304" y="3373967"/>
+            <a:ext cx="2953004" cy="325967"/>
           </a:xfrm>
           <a:prstGeom prst="rect">
             <a:avLst/>
@@ -6675,7 +6675,7 @@
                 <a:cs typeface="NanumGothic"/>
                 <a:ea typeface="NanumGothic"/>
               </a:rPr>
-              <a:t>문맥이 전부 준수</a:t>
+              <a:t>문맥이 전부 준수 — 오염이 없을 때</a:t>
             </a:r>
           </a:p>
         </p:txBody>
@@ -6688,8 +6688,8 @@
         </p:nvSpPr>
         <p:spPr>
           <a:xfrm>
-            <a:off x="3830320" y="3399367"/>
-            <a:ext cx="1846580" cy="325967"/>
+            <a:off x="4534408" y="3373967"/>
+            <a:ext cx="1142492" cy="325967"/>
           </a:xfrm>
           <a:prstGeom prst="rect">
             <a:avLst/>
@@ -6716,7 +6716,7 @@
                 <a:cs typeface="NanumGothic"/>
                 <a:ea typeface="NanumGothic"/>
               </a:rPr>
-              <a:t>천장 — 오염이 없을 때</a:t>
+              <a:t>천장</a:t>
             </a:r>
           </a:p>
         </p:txBody>
@@ -6729,7 +6729,7 @@
         </p:nvSpPr>
         <p:spPr>
           <a:xfrm>
-            <a:off x="812800" y="3661833"/>
+            <a:off x="812800" y="3636433"/>
             <a:ext cx="5029200" cy="7620"/>
           </a:xfrm>
           <a:prstGeom prst="rect">
@@ -6773,8 +6773,8 @@
         </p:nvSpPr>
         <p:spPr>
           <a:xfrm>
-            <a:off x="812800" y="3725333"/>
-            <a:ext cx="1041908" cy="325967"/>
+            <a:off x="812800" y="3699933"/>
+            <a:ext cx="438404" cy="325967"/>
           </a:xfrm>
           <a:prstGeom prst="rect">
             <a:avLst/>
@@ -6801,7 +6801,7 @@
                 <a:cs typeface="NanumGothic"/>
                 <a:ea typeface="NanumGothic"/>
               </a:rPr>
-              <a:t>S(x^int)</a:t>
+              <a:t>S₂</a:t>
             </a:r>
           </a:p>
         </p:txBody>
@@ -6814,8 +6814,8 @@
         </p:nvSpPr>
         <p:spPr>
           <a:xfrm>
-            <a:off x="2019808" y="3725333"/>
-            <a:ext cx="1645412" cy="325967"/>
+            <a:off x="1416304" y="3699933"/>
+            <a:ext cx="2953004" cy="325967"/>
           </a:xfrm>
           <a:prstGeom prst="rect">
             <a:avLst/>
@@ -6842,7 +6842,7 @@
                 <a:cs typeface="NanumGothic"/>
                 <a:ea typeface="NanumGothic"/>
               </a:rPr>
-              <a:t>위반 문맥의 KV를 덮은 것</a:t>
+              <a:t>위반 문맥의 내부 값(KV)을 덮은 뒤</a:t>
             </a:r>
           </a:p>
         </p:txBody>
@@ -6855,8 +6855,8 @@
         </p:nvSpPr>
         <p:spPr>
           <a:xfrm>
-            <a:off x="3830320" y="3725333"/>
-            <a:ext cx="1846580" cy="325967"/>
+            <a:off x="4534408" y="3699933"/>
+            <a:ext cx="1142492" cy="325967"/>
           </a:xfrm>
           <a:prstGeom prst="rect">
             <a:avLst/>
@@ -7055,7 +7055,7 @@
       </p:sp>
       <p:pic>
         <p:nvPicPr>
-          <p:cNvPr id="30" name="Picture 29" descr="eq_undec.png"/>
+          <p:cNvPr id="30" name="Picture 29" descr="eq_undec2.png"/>
           <p:cNvPicPr>
             <a:picLocks noChangeAspect="1"/>
           </p:cNvPicPr>
@@ -7070,7 +7070,7 @@
         <p:spPr>
           <a:xfrm>
             <a:off x="6350000" y="2159000"/>
-            <a:ext cx="5166290" cy="368300"/>
+            <a:ext cx="1908827" cy="330200"/>
           </a:xfrm>
           <a:prstGeom prst="rect">
             <a:avLst/>
@@ -7085,7 +7085,44 @@
         </p:nvSpPr>
         <p:spPr>
           <a:xfrm>
-            <a:off x="6350000" y="2692400"/>
+            <a:off x="6350000" y="2514600"/>
+            <a:ext cx="5029200" cy="127000"/>
+          </a:xfrm>
+          <a:prstGeom prst="rect">
+            <a:avLst/>
+          </a:prstGeom>
+          <a:noFill/>
+        </p:spPr>
+        <p:txBody>
+          <a:bodyPr wrap="square" lIns="0" rIns="0" tIns="0" bIns="0" anchor="t">
+            <a:spAutoFit/>
+          </a:bodyPr>
+          <a:lstStyle/>
+          <a:p>
+            <a:pPr algn="l"/>
+            <a:r>
+              <a:rPr sz="950" b="0">
+                <a:solidFill>
+                  <a:srgbClr val="6B6B6B"/>
+                </a:solidFill>
+                <a:latin typeface="NanumGothic"/>
+                <a:cs typeface="NanumGothic"/>
+                <a:ea typeface="NanumGothic"/>
+              </a:rPr>
+              <a:t>S₀  기준(개입 없음)   S₁  천장(오염 없음)</a:t>
+            </a:r>
+          </a:p>
+        </p:txBody>
+      </p:sp>
+      <p:sp>
+        <p:nvSpPr>
+          <p:cNvPr id="32" name="TextBox 31"/>
+          <p:cNvSpPr txBox="1"/>
+          <p:nvPr/>
+        </p:nvSpPr>
+        <p:spPr>
+          <a:xfrm>
+            <a:off x="6350000" y="2730500"/>
             <a:ext cx="5029200" cy="1231900"/>
           </a:xfrm>
           <a:prstGeom prst="rect">
@@ -7627,7 +7664,7 @@
         <p:spPr>
           <a:xfrm>
             <a:off x="812800" y="2159000"/>
-            <a:ext cx="3277626" cy="381000"/>
+            <a:ext cx="3568828" cy="381000"/>
           </a:xfrm>
           <a:prstGeom prst="rect">
             <a:avLst/>
@@ -9443,7 +9480,7 @@
         <p:spPr>
           <a:xfrm>
             <a:off x="6350000" y="4724400"/>
-            <a:ext cx="1710989" cy="342900"/>
+            <a:ext cx="1584249" cy="317500"/>
           </a:xfrm>
           <a:prstGeom prst="rect">
             <a:avLst/>
@@ -9458,7 +9495,44 @@
         </p:nvSpPr>
         <p:spPr>
           <a:xfrm>
-            <a:off x="6350000" y="5181600"/>
+            <a:off x="6350000" y="5067300"/>
+            <a:ext cx="5029200" cy="127000"/>
+          </a:xfrm>
+          <a:prstGeom prst="rect">
+            <a:avLst/>
+          </a:prstGeom>
+          <a:noFill/>
+        </p:spPr>
+        <p:txBody>
+          <a:bodyPr wrap="square" lIns="0" rIns="0" tIns="0" bIns="0" anchor="t">
+            <a:spAutoFit/>
+          </a:bodyPr>
+          <a:lstStyle/>
+          <a:p>
+            <a:pPr algn="l"/>
+            <a:r>
+              <a:rPr sz="950" b="0">
+                <a:solidFill>
+                  <a:srgbClr val="6B6B6B"/>
+                </a:solidFill>
+                <a:latin typeface="NanumGothic"/>
+                <a:cs typeface="NanumGothic"/>
+                <a:ea typeface="NanumGothic"/>
+              </a:rPr>
+              <a:t>왼쪽  우리가 재는 값   오른쪽  실제로 잔차에 더해지는 크기</a:t>
+            </a:r>
+          </a:p>
+        </p:txBody>
+      </p:sp>
+      <p:sp>
+        <p:nvSpPr>
+          <p:cNvPr id="57" name="TextBox 56"/>
+          <p:cNvSpPr txBox="1"/>
+          <p:nvPr/>
+        </p:nvSpPr>
+        <p:spPr>
+          <a:xfrm>
+            <a:off x="6350000" y="5270500"/>
             <a:ext cx="5029200" cy="692662"/>
           </a:xfrm>
           <a:prstGeom prst="rect">
@@ -9493,13 +9567,13 @@
       </p:sp>
       <p:sp>
         <p:nvSpPr>
-          <p:cNvPr id="57" name="TextBox 56"/>
-          <p:cNvSpPr txBox="1"/>
-          <p:nvPr/>
-        </p:nvSpPr>
-        <p:spPr>
-          <a:xfrm>
-            <a:off x="6350000" y="5892800"/>
+          <p:cNvPr id="58" name="TextBox 57"/>
+          <p:cNvSpPr txBox="1"/>
+          <p:nvPr/>
+        </p:nvSpPr>
+        <p:spPr>
+          <a:xfrm>
+            <a:off x="6350000" y="5981700"/>
             <a:ext cx="5029200" cy="692662"/>
           </a:xfrm>
           <a:prstGeom prst="rect">
@@ -9928,7 +10002,7 @@
         <p:spPr>
           <a:xfrm>
             <a:off x="812800" y="2159000"/>
-            <a:ext cx="2617281" cy="368300"/>
+            <a:ext cx="2205747" cy="342900"/>
           </a:xfrm>
           <a:prstGeom prst="rect">
             <a:avLst/>
@@ -9943,7 +10017,44 @@
         </p:nvSpPr>
         <p:spPr>
           <a:xfrm>
-            <a:off x="812800" y="2654300"/>
+            <a:off x="812800" y="2527300"/>
+            <a:ext cx="5029200" cy="127000"/>
+          </a:xfrm>
+          <a:prstGeom prst="rect">
+            <a:avLst/>
+          </a:prstGeom>
+          <a:noFill/>
+        </p:spPr>
+        <p:txBody>
+          <a:bodyPr wrap="square" lIns="0" rIns="0" tIns="0" bIns="0" anchor="t">
+            <a:spAutoFit/>
+          </a:bodyPr>
+          <a:lstStyle/>
+          <a:p>
+            <a:pPr algn="l"/>
+            <a:r>
+              <a:rPr sz="950" b="0">
+                <a:solidFill>
+                  <a:srgbClr val="6B6B6B"/>
+                </a:solidFill>
+                <a:latin typeface="NanumGothic"/>
+                <a:cs typeface="NanumGothic"/>
+                <a:ea typeface="NanumGothic"/>
+              </a:rPr>
+              <a:t>D  공여 쪽 조각 자리   P  덮을 자리   k  Key — Value도 같다</a:t>
+            </a:r>
+          </a:p>
+        </p:txBody>
+      </p:sp>
+      <p:sp>
+        <p:nvSpPr>
+          <p:cNvPr id="13" name="TextBox 12"/>
+          <p:cNvSpPr txBox="1"/>
+          <p:nvPr/>
+        </p:nvSpPr>
+        <p:spPr>
+          <a:xfrm>
+            <a:off x="812800" y="2730500"/>
             <a:ext cx="5029200" cy="910849"/>
           </a:xfrm>
           <a:prstGeom prst="rect">
@@ -9978,13 +10089,13 @@
       </p:sp>
       <p:sp>
         <p:nvSpPr>
-          <p:cNvPr id="13" name="TextBox 12"/>
-          <p:cNvSpPr txBox="1"/>
-          <p:nvPr/>
-        </p:nvSpPr>
-        <p:spPr>
-          <a:xfrm>
-            <a:off x="812800" y="3755649"/>
+          <p:cNvPr id="14" name="TextBox 13"/>
+          <p:cNvSpPr txBox="1"/>
+          <p:nvPr/>
+        </p:nvSpPr>
+        <p:spPr>
+          <a:xfrm>
+            <a:off x="812800" y="3831849"/>
             <a:ext cx="1106424" cy="114300"/>
           </a:xfrm>
           <a:prstGeom prst="rect">
@@ -10015,13 +10126,13 @@
       </p:sp>
       <p:sp>
         <p:nvSpPr>
-          <p:cNvPr id="14" name="TextBox 13"/>
-          <p:cNvSpPr txBox="1"/>
-          <p:nvPr/>
-        </p:nvSpPr>
-        <p:spPr>
-          <a:xfrm>
-            <a:off x="1919224" y="3755649"/>
+          <p:cNvPr id="15" name="TextBox 14"/>
+          <p:cNvSpPr txBox="1"/>
+          <p:nvPr/>
+        </p:nvSpPr>
+        <p:spPr>
+          <a:xfrm>
+            <a:off x="1919224" y="3831849"/>
             <a:ext cx="3922776" cy="114300"/>
           </a:xfrm>
           <a:prstGeom prst="rect">
@@ -10052,13 +10163,13 @@
       </p:sp>
       <p:sp>
         <p:nvSpPr>
-          <p:cNvPr id="15" name="Rectangle 14"/>
+          <p:cNvPr id="16" name="Rectangle 15"/>
           <p:cNvSpPr/>
           <p:nvPr/>
         </p:nvSpPr>
         <p:spPr>
           <a:xfrm>
-            <a:off x="812800" y="3908049"/>
+            <a:off x="812800" y="3984249"/>
             <a:ext cx="5029200" cy="7620"/>
           </a:xfrm>
           <a:prstGeom prst="rect">
@@ -10096,14 +10207,14 @@
       </p:sp>
       <p:sp>
         <p:nvSpPr>
-          <p:cNvPr id="16" name="TextBox 15"/>
-          <p:cNvSpPr txBox="1"/>
-          <p:nvPr/>
-        </p:nvSpPr>
-        <p:spPr>
-          <a:xfrm>
-            <a:off x="812800" y="4009649"/>
-            <a:ext cx="941324" cy="602772"/>
+          <p:cNvPr id="17" name="TextBox 16"/>
+          <p:cNvSpPr txBox="1"/>
+          <p:nvPr/>
+        </p:nvSpPr>
+        <p:spPr>
+          <a:xfrm>
+            <a:off x="812800" y="4085849"/>
+            <a:ext cx="941324" cy="577372"/>
           </a:xfrm>
           <a:prstGeom prst="rect">
             <a:avLst/>
@@ -10137,14 +10248,14 @@
       </p:sp>
       <p:sp>
         <p:nvSpPr>
-          <p:cNvPr id="17" name="TextBox 16"/>
-          <p:cNvSpPr txBox="1"/>
-          <p:nvPr/>
-        </p:nvSpPr>
-        <p:spPr>
-          <a:xfrm>
-            <a:off x="1919224" y="4009649"/>
-            <a:ext cx="3757676" cy="602772"/>
+          <p:cNvPr id="18" name="TextBox 17"/>
+          <p:cNvSpPr txBox="1"/>
+          <p:nvPr/>
+        </p:nvSpPr>
+        <p:spPr>
+          <a:xfrm>
+            <a:off x="1919224" y="4085849"/>
+            <a:ext cx="3757676" cy="577372"/>
           </a:xfrm>
           <a:prstGeom prst="rect">
             <a:avLst/>
@@ -10178,13 +10289,13 @@
       </p:sp>
       <p:sp>
         <p:nvSpPr>
-          <p:cNvPr id="18" name="Rectangle 17"/>
+          <p:cNvPr id="19" name="Rectangle 18"/>
           <p:cNvSpPr/>
           <p:nvPr/>
         </p:nvSpPr>
         <p:spPr>
           <a:xfrm>
-            <a:off x="812800" y="4548921"/>
+            <a:off x="812800" y="4599721"/>
             <a:ext cx="5029200" cy="7620"/>
           </a:xfrm>
           <a:prstGeom prst="rect">
@@ -10222,14 +10333,14 @@
       </p:sp>
       <p:sp>
         <p:nvSpPr>
-          <p:cNvPr id="19" name="TextBox 18"/>
-          <p:cNvSpPr txBox="1"/>
-          <p:nvPr/>
-        </p:nvSpPr>
-        <p:spPr>
-          <a:xfrm>
-            <a:off x="812800" y="4612421"/>
-            <a:ext cx="941324" cy="602772"/>
+          <p:cNvPr id="20" name="TextBox 19"/>
+          <p:cNvSpPr txBox="1"/>
+          <p:nvPr/>
+        </p:nvSpPr>
+        <p:spPr>
+          <a:xfrm>
+            <a:off x="812800" y="4663221"/>
+            <a:ext cx="941324" cy="577372"/>
           </a:xfrm>
           <a:prstGeom prst="rect">
             <a:avLst/>
@@ -10263,14 +10374,14 @@
       </p:sp>
       <p:sp>
         <p:nvSpPr>
-          <p:cNvPr id="20" name="TextBox 19"/>
-          <p:cNvSpPr txBox="1"/>
-          <p:nvPr/>
-        </p:nvSpPr>
-        <p:spPr>
-          <a:xfrm>
-            <a:off x="1919224" y="4612421"/>
-            <a:ext cx="3757676" cy="602772"/>
+          <p:cNvPr id="21" name="TextBox 20"/>
+          <p:cNvSpPr txBox="1"/>
+          <p:nvPr/>
+        </p:nvSpPr>
+        <p:spPr>
+          <a:xfrm>
+            <a:off x="1919224" y="4663221"/>
+            <a:ext cx="3757676" cy="577372"/>
           </a:xfrm>
           <a:prstGeom prst="rect">
             <a:avLst/>
@@ -10304,13 +10415,13 @@
       </p:sp>
       <p:sp>
         <p:nvSpPr>
-          <p:cNvPr id="21" name="Rectangle 20"/>
+          <p:cNvPr id="22" name="Rectangle 21"/>
           <p:cNvSpPr/>
           <p:nvPr/>
         </p:nvSpPr>
         <p:spPr>
           <a:xfrm>
-            <a:off x="812800" y="5151693"/>
+            <a:off x="812800" y="5177093"/>
             <a:ext cx="5029200" cy="7620"/>
           </a:xfrm>
           <a:prstGeom prst="rect">
@@ -10348,14 +10459,14 @@
       </p:sp>
       <p:sp>
         <p:nvSpPr>
-          <p:cNvPr id="22" name="TextBox 21"/>
-          <p:cNvSpPr txBox="1"/>
-          <p:nvPr/>
-        </p:nvSpPr>
-        <p:spPr>
-          <a:xfrm>
-            <a:off x="812800" y="5215193"/>
-            <a:ext cx="941324" cy="602772"/>
+          <p:cNvPr id="23" name="TextBox 22"/>
+          <p:cNvSpPr txBox="1"/>
+          <p:nvPr/>
+        </p:nvSpPr>
+        <p:spPr>
+          <a:xfrm>
+            <a:off x="812800" y="5240593"/>
+            <a:ext cx="941324" cy="577372"/>
           </a:xfrm>
           <a:prstGeom prst="rect">
             <a:avLst/>
@@ -10389,14 +10500,14 @@
       </p:sp>
       <p:sp>
         <p:nvSpPr>
-          <p:cNvPr id="23" name="TextBox 22"/>
-          <p:cNvSpPr txBox="1"/>
-          <p:nvPr/>
-        </p:nvSpPr>
-        <p:spPr>
-          <a:xfrm>
-            <a:off x="1919224" y="5215193"/>
-            <a:ext cx="3757676" cy="602772"/>
+          <p:cNvPr id="24" name="TextBox 23"/>
+          <p:cNvSpPr txBox="1"/>
+          <p:nvPr/>
+        </p:nvSpPr>
+        <p:spPr>
+          <a:xfrm>
+            <a:off x="1919224" y="5240593"/>
+            <a:ext cx="3757676" cy="577372"/>
           </a:xfrm>
           <a:prstGeom prst="rect">
             <a:avLst/>
@@ -10430,7 +10541,7 @@
       </p:sp>
       <p:sp>
         <p:nvSpPr>
-          <p:cNvPr id="24" name="Rounded Rectangle 23"/>
+          <p:cNvPr id="25" name="Rounded Rectangle 24"/>
           <p:cNvSpPr/>
           <p:nvPr/>
         </p:nvSpPr>
@@ -10476,7 +10587,7 @@
       </p:sp>
       <p:sp>
         <p:nvSpPr>
-          <p:cNvPr id="25" name="TextBox 24"/>
+          <p:cNvPr id="26" name="TextBox 25"/>
           <p:cNvSpPr txBox="1"/>
           <p:nvPr/>
         </p:nvSpPr>
@@ -10513,7 +10624,7 @@
       </p:sp>
       <p:sp>
         <p:nvSpPr>
-          <p:cNvPr id="26" name="TextBox 25"/>
+          <p:cNvPr id="27" name="TextBox 26"/>
           <p:cNvSpPr txBox="1"/>
           <p:nvPr/>
         </p:nvSpPr>
@@ -10554,7 +10665,7 @@
       </p:sp>
       <p:sp>
         <p:nvSpPr>
-          <p:cNvPr id="27" name="TextBox 26"/>
+          <p:cNvPr id="28" name="TextBox 27"/>
           <p:cNvSpPr txBox="1"/>
           <p:nvPr/>
         </p:nvSpPr>
@@ -10613,7 +10724,7 @@
       </p:sp>
       <p:pic>
         <p:nvPicPr>
-          <p:cNvPr id="28" name="Picture 27" descr="eq_rope.png"/>
+          <p:cNvPr id="29" name="Picture 28" descr="eq_rope.png"/>
           <p:cNvPicPr>
             <a:picLocks noChangeAspect="1"/>
           </p:cNvPicPr>
@@ -10627,8 +10738,8 @@
         </p:blipFill>
         <p:spPr>
           <a:xfrm>
-            <a:off x="6350000" y="2946400"/>
-            <a:ext cx="3846838" cy="342900"/>
+            <a:off x="6350000" y="2933700"/>
+            <a:ext cx="3419412" cy="304800"/>
           </a:xfrm>
           <a:prstGeom prst="rect">
             <a:avLst/>
@@ -10637,13 +10748,50 @@
       </p:pic>
       <p:sp>
         <p:nvSpPr>
-          <p:cNvPr id="29" name="TextBox 28"/>
-          <p:cNvSpPr txBox="1"/>
-          <p:nvPr/>
-        </p:nvSpPr>
-        <p:spPr>
-          <a:xfrm>
-            <a:off x="6350000" y="3390900"/>
+          <p:cNvPr id="30" name="TextBox 29"/>
+          <p:cNvSpPr txBox="1"/>
+          <p:nvPr/>
+        </p:nvSpPr>
+        <p:spPr>
+          <a:xfrm>
+            <a:off x="6350000" y="3276600"/>
+            <a:ext cx="5029200" cy="127000"/>
+          </a:xfrm>
+          <a:prstGeom prst="rect">
+            <a:avLst/>
+          </a:prstGeom>
+          <a:noFill/>
+        </p:spPr>
+        <p:txBody>
+          <a:bodyPr wrap="square" lIns="0" rIns="0" tIns="0" bIns="0" anchor="t">
+            <a:spAutoFit/>
+          </a:bodyPr>
+          <a:lstStyle/>
+          <a:p>
+            <a:pPr algn="l"/>
+            <a:r>
+              <a:rPr sz="950" b="0">
+                <a:solidFill>
+                  <a:srgbClr val="6B6B6B"/>
+                </a:solidFill>
+                <a:latin typeface="NanumGothic"/>
+                <a:cs typeface="NanumGothic"/>
+                <a:ea typeface="NanumGothic"/>
+              </a:rPr>
+              <a:t>R  위치에 따른 회전 — Key에만 붙는다   k·v  캐시에 저장되는 값</a:t>
+            </a:r>
+          </a:p>
+        </p:txBody>
+      </p:sp>
+      <p:sp>
+        <p:nvSpPr>
+          <p:cNvPr id="31" name="TextBox 30"/>
+          <p:cNvSpPr txBox="1"/>
+          <p:nvPr/>
+        </p:nvSpPr>
+        <p:spPr>
+          <a:xfrm>
+            <a:off x="6350000" y="3479800"/>
             <a:ext cx="5029200" cy="692662"/>
           </a:xfrm>
           <a:prstGeom prst="rect">
@@ -10678,13 +10826,13 @@
       </p:sp>
       <p:sp>
         <p:nvSpPr>
-          <p:cNvPr id="30" name="TextBox 29"/>
-          <p:cNvSpPr txBox="1"/>
-          <p:nvPr/>
-        </p:nvSpPr>
-        <p:spPr>
-          <a:xfrm>
-            <a:off x="6350000" y="4089400"/>
+          <p:cNvPr id="32" name="TextBox 31"/>
+          <p:cNvSpPr txBox="1"/>
+          <p:nvPr/>
+        </p:nvSpPr>
+        <p:spPr>
+          <a:xfrm>
+            <a:off x="6350000" y="4178300"/>
             <a:ext cx="5029200" cy="474475"/>
           </a:xfrm>
           <a:prstGeom prst="rect">
@@ -10981,11 +11129,11 @@
         <p:spPr>
           <a:xfrm>
             <a:off x="635000" y="1752600"/>
-            <a:ext cx="10922000" cy="1587500"/>
+            <a:ext cx="10922000" cy="2095500"/>
           </a:xfrm>
           <a:prstGeom prst="roundRect">
             <a:avLst>
-              <a:gd name="adj" fmla="val 4800"/>
+              <a:gd name="adj" fmla="val 3636"/>
             </a:avLst>
           </a:prstGeom>
           <a:solidFill>
@@ -11112,8 +11260,8 @@
         </p:blipFill>
         <p:spPr>
           <a:xfrm>
-            <a:off x="812800" y="2819400"/>
-            <a:ext cx="1438416" cy="368300"/>
+            <a:off x="812800" y="2806700"/>
+            <a:ext cx="1125855" cy="342900"/>
           </a:xfrm>
           <a:prstGeom prst="rect">
             <a:avLst/>
@@ -11128,7 +11276,44 @@
         </p:nvSpPr>
         <p:spPr>
           <a:xfrm>
-            <a:off x="812800" y="3295650"/>
+            <a:off x="812800" y="3200400"/>
+            <a:ext cx="10566400" cy="127000"/>
+          </a:xfrm>
+          <a:prstGeom prst="rect">
+            <a:avLst/>
+          </a:prstGeom>
+          <a:noFill/>
+        </p:spPr>
+        <p:txBody>
+          <a:bodyPr wrap="square" lIns="0" rIns="0" tIns="0" bIns="0" anchor="t">
+            <a:spAutoFit/>
+          </a:bodyPr>
+          <a:lstStyle/>
+          <a:p>
+            <a:pPr algn="l"/>
+            <a:r>
+              <a:rPr sz="950" b="0">
+                <a:solidFill>
+                  <a:srgbClr val="6B6B6B"/>
+                </a:solidFill>
+                <a:latin typeface="NanumGothic"/>
+                <a:cs typeface="NanumGothic"/>
+                <a:ea typeface="NanumGothic"/>
+              </a:rPr>
+              <a:t>R  처치 — 표기를 바꿔 넣은 것   R′  통제 — 표기 정보 없이 덮기만 한 것   b  묶음 번호 1~42</a:t>
+            </a:r>
+          </a:p>
+        </p:txBody>
+      </p:sp>
+      <p:sp>
+        <p:nvSpPr>
+          <p:cNvPr id="13" name="TextBox 12"/>
+          <p:cNvSpPr txBox="1"/>
+          <p:nvPr/>
+        </p:nvSpPr>
+        <p:spPr>
+          <a:xfrm>
+            <a:off x="812800" y="3365500"/>
             <a:ext cx="10566400" cy="256287"/>
           </a:xfrm>
           <a:prstGeom prst="rect">
@@ -11163,18 +11348,18 @@
       </p:sp>
       <p:sp>
         <p:nvSpPr>
-          <p:cNvPr id="13" name="Rounded Rectangle 12"/>
+          <p:cNvPr id="14" name="Rounded Rectangle 13"/>
           <p:cNvSpPr/>
           <p:nvPr/>
         </p:nvSpPr>
         <p:spPr>
           <a:xfrm>
-            <a:off x="635000" y="3492500"/>
-            <a:ext cx="10922000" cy="2762250"/>
+            <a:off x="635000" y="4000500"/>
+            <a:ext cx="10922000" cy="2254250"/>
           </a:xfrm>
           <a:prstGeom prst="roundRect">
             <a:avLst>
-              <a:gd name="adj" fmla="val 2758"/>
+              <a:gd name="adj" fmla="val 3380"/>
             </a:avLst>
           </a:prstGeom>
           <a:solidFill>
@@ -11209,13 +11394,13 @@
       </p:sp>
       <p:sp>
         <p:nvSpPr>
-          <p:cNvPr id="14" name="TextBox 13"/>
-          <p:cNvSpPr txBox="1"/>
-          <p:nvPr/>
-        </p:nvSpPr>
-        <p:spPr>
-          <a:xfrm>
-            <a:off x="812800" y="3670300"/>
+          <p:cNvPr id="15" name="TextBox 14"/>
+          <p:cNvSpPr txBox="1"/>
+          <p:nvPr/>
+        </p:nvSpPr>
+        <p:spPr>
+          <a:xfrm>
+            <a:off x="812800" y="4178300"/>
             <a:ext cx="10566400" cy="101600"/>
           </a:xfrm>
           <a:prstGeom prst="rect">
@@ -11246,13 +11431,13 @@
       </p:sp>
       <p:sp>
         <p:nvSpPr>
-          <p:cNvPr id="15" name="TextBox 14"/>
-          <p:cNvSpPr txBox="1"/>
-          <p:nvPr/>
-        </p:nvSpPr>
-        <p:spPr>
-          <a:xfrm>
-            <a:off x="812800" y="3924300"/>
+          <p:cNvPr id="16" name="TextBox 15"/>
+          <p:cNvSpPr txBox="1"/>
+          <p:nvPr/>
+        </p:nvSpPr>
+        <p:spPr>
+          <a:xfrm>
+            <a:off x="812800" y="4432300"/>
             <a:ext cx="1479296" cy="114300"/>
           </a:xfrm>
           <a:prstGeom prst="rect">
@@ -11283,13 +11468,13 @@
       </p:sp>
       <p:sp>
         <p:nvSpPr>
-          <p:cNvPr id="16" name="TextBox 15"/>
-          <p:cNvSpPr txBox="1"/>
-          <p:nvPr/>
-        </p:nvSpPr>
-        <p:spPr>
-          <a:xfrm>
-            <a:off x="2292096" y="3924300"/>
+          <p:cNvPr id="17" name="TextBox 16"/>
+          <p:cNvSpPr txBox="1"/>
+          <p:nvPr/>
+        </p:nvSpPr>
+        <p:spPr>
+          <a:xfrm>
+            <a:off x="2292096" y="4432300"/>
             <a:ext cx="2535936" cy="114300"/>
           </a:xfrm>
           <a:prstGeom prst="rect">
@@ -11320,13 +11505,13 @@
       </p:sp>
       <p:sp>
         <p:nvSpPr>
-          <p:cNvPr id="17" name="TextBox 16"/>
-          <p:cNvSpPr txBox="1"/>
-          <p:nvPr/>
-        </p:nvSpPr>
-        <p:spPr>
-          <a:xfrm>
-            <a:off x="4828032" y="3924300"/>
+          <p:cNvPr id="18" name="TextBox 17"/>
+          <p:cNvSpPr txBox="1"/>
+          <p:nvPr/>
+        </p:nvSpPr>
+        <p:spPr>
+          <a:xfrm>
+            <a:off x="4828032" y="4432300"/>
             <a:ext cx="2747264" cy="114300"/>
           </a:xfrm>
           <a:prstGeom prst="rect">
@@ -11357,13 +11542,13 @@
       </p:sp>
       <p:sp>
         <p:nvSpPr>
-          <p:cNvPr id="18" name="TextBox 17"/>
-          <p:cNvSpPr txBox="1"/>
-          <p:nvPr/>
-        </p:nvSpPr>
-        <p:spPr>
-          <a:xfrm>
-            <a:off x="7575296" y="3924300"/>
+          <p:cNvPr id="19" name="TextBox 18"/>
+          <p:cNvSpPr txBox="1"/>
+          <p:nvPr/>
+        </p:nvSpPr>
+        <p:spPr>
+          <a:xfrm>
+            <a:off x="7575296" y="4432300"/>
             <a:ext cx="3803904" cy="114300"/>
           </a:xfrm>
           <a:prstGeom prst="rect">
@@ -11394,13 +11579,13 @@
       </p:sp>
       <p:sp>
         <p:nvSpPr>
-          <p:cNvPr id="19" name="Rectangle 18"/>
+          <p:cNvPr id="20" name="Rectangle 19"/>
           <p:cNvSpPr/>
           <p:nvPr/>
         </p:nvSpPr>
         <p:spPr>
           <a:xfrm>
-            <a:off x="812800" y="4076700"/>
+            <a:off x="812800" y="4584700"/>
             <a:ext cx="10566400" cy="7620"/>
           </a:xfrm>
           <a:prstGeom prst="rect">
@@ -11438,14 +11623,14 @@
       </p:sp>
       <p:sp>
         <p:nvSpPr>
-          <p:cNvPr id="20" name="TextBox 19"/>
-          <p:cNvSpPr txBox="1"/>
-          <p:nvPr/>
-        </p:nvSpPr>
-        <p:spPr>
-          <a:xfrm>
-            <a:off x="812800" y="4178300"/>
-            <a:ext cx="1314196" cy="641350"/>
+          <p:cNvPr id="21" name="TextBox 20"/>
+          <p:cNvSpPr txBox="1"/>
+          <p:nvPr/>
+        </p:nvSpPr>
+        <p:spPr>
+          <a:xfrm>
+            <a:off x="812800" y="4686300"/>
+            <a:ext cx="1314196" cy="472017"/>
           </a:xfrm>
           <a:prstGeom prst="rect">
             <a:avLst/>
@@ -11479,14 +11664,14 @@
       </p:sp>
       <p:sp>
         <p:nvSpPr>
-          <p:cNvPr id="21" name="TextBox 20"/>
-          <p:cNvSpPr txBox="1"/>
-          <p:nvPr/>
-        </p:nvSpPr>
-        <p:spPr>
-          <a:xfrm>
-            <a:off x="2292096" y="4178300"/>
-            <a:ext cx="2370836" cy="641350"/>
+          <p:cNvPr id="22" name="TextBox 21"/>
+          <p:cNvSpPr txBox="1"/>
+          <p:nvPr/>
+        </p:nvSpPr>
+        <p:spPr>
+          <a:xfrm>
+            <a:off x="2292096" y="4686300"/>
+            <a:ext cx="2370836" cy="472017"/>
           </a:xfrm>
           <a:prstGeom prst="rect">
             <a:avLst/>
@@ -11520,14 +11705,14 @@
       </p:sp>
       <p:sp>
         <p:nvSpPr>
-          <p:cNvPr id="22" name="TextBox 21"/>
-          <p:cNvSpPr txBox="1"/>
-          <p:nvPr/>
-        </p:nvSpPr>
-        <p:spPr>
-          <a:xfrm>
-            <a:off x="4828032" y="4178300"/>
-            <a:ext cx="2582164" cy="641350"/>
+          <p:cNvPr id="23" name="TextBox 22"/>
+          <p:cNvSpPr txBox="1"/>
+          <p:nvPr/>
+        </p:nvSpPr>
+        <p:spPr>
+          <a:xfrm>
+            <a:off x="4828032" y="4686300"/>
+            <a:ext cx="2582164" cy="472017"/>
           </a:xfrm>
           <a:prstGeom prst="rect">
             <a:avLst/>
@@ -11561,14 +11746,14 @@
       </p:sp>
       <p:sp>
         <p:nvSpPr>
-          <p:cNvPr id="23" name="TextBox 22"/>
-          <p:cNvSpPr txBox="1"/>
-          <p:nvPr/>
-        </p:nvSpPr>
-        <p:spPr>
-          <a:xfrm>
-            <a:off x="7575296" y="4178300"/>
-            <a:ext cx="3638804" cy="641350"/>
+          <p:cNvPr id="24" name="TextBox 23"/>
+          <p:cNvSpPr txBox="1"/>
+          <p:nvPr/>
+        </p:nvSpPr>
+        <p:spPr>
+          <a:xfrm>
+            <a:off x="7575296" y="4686300"/>
+            <a:ext cx="3638804" cy="472017"/>
           </a:xfrm>
           <a:prstGeom prst="rect">
             <a:avLst/>
@@ -11602,13 +11787,13 @@
       </p:sp>
       <p:sp>
         <p:nvSpPr>
-          <p:cNvPr id="24" name="Rectangle 23"/>
+          <p:cNvPr id="25" name="Rectangle 24"/>
           <p:cNvSpPr/>
           <p:nvPr/>
         </p:nvSpPr>
         <p:spPr>
           <a:xfrm>
-            <a:off x="812800" y="4756150"/>
+            <a:off x="812800" y="5094817"/>
             <a:ext cx="10566400" cy="7620"/>
           </a:xfrm>
           <a:prstGeom prst="rect">
@@ -11646,14 +11831,14 @@
       </p:sp>
       <p:sp>
         <p:nvSpPr>
-          <p:cNvPr id="25" name="TextBox 24"/>
-          <p:cNvSpPr txBox="1"/>
-          <p:nvPr/>
-        </p:nvSpPr>
-        <p:spPr>
-          <a:xfrm>
-            <a:off x="812800" y="4819650"/>
-            <a:ext cx="1314196" cy="641350"/>
+          <p:cNvPr id="26" name="TextBox 25"/>
+          <p:cNvSpPr txBox="1"/>
+          <p:nvPr/>
+        </p:nvSpPr>
+        <p:spPr>
+          <a:xfrm>
+            <a:off x="812800" y="5158317"/>
+            <a:ext cx="1314196" cy="472017"/>
           </a:xfrm>
           <a:prstGeom prst="rect">
             <a:avLst/>
@@ -11687,14 +11872,14 @@
       </p:sp>
       <p:sp>
         <p:nvSpPr>
-          <p:cNvPr id="26" name="TextBox 25"/>
-          <p:cNvSpPr txBox="1"/>
-          <p:nvPr/>
-        </p:nvSpPr>
-        <p:spPr>
-          <a:xfrm>
-            <a:off x="2292096" y="4819650"/>
-            <a:ext cx="2370836" cy="641350"/>
+          <p:cNvPr id="27" name="TextBox 26"/>
+          <p:cNvSpPr txBox="1"/>
+          <p:nvPr/>
+        </p:nvSpPr>
+        <p:spPr>
+          <a:xfrm>
+            <a:off x="2292096" y="5158317"/>
+            <a:ext cx="2370836" cy="472017"/>
           </a:xfrm>
           <a:prstGeom prst="rect">
             <a:avLst/>
@@ -11728,14 +11913,14 @@
       </p:sp>
       <p:sp>
         <p:nvSpPr>
-          <p:cNvPr id="27" name="TextBox 26"/>
-          <p:cNvSpPr txBox="1"/>
-          <p:nvPr/>
-        </p:nvSpPr>
-        <p:spPr>
-          <a:xfrm>
-            <a:off x="4828032" y="4819650"/>
-            <a:ext cx="2582164" cy="641350"/>
+          <p:cNvPr id="28" name="TextBox 27"/>
+          <p:cNvSpPr txBox="1"/>
+          <p:nvPr/>
+        </p:nvSpPr>
+        <p:spPr>
+          <a:xfrm>
+            <a:off x="4828032" y="5158317"/>
+            <a:ext cx="2582164" cy="472017"/>
           </a:xfrm>
           <a:prstGeom prst="rect">
             <a:avLst/>
@@ -11769,14 +11954,14 @@
       </p:sp>
       <p:sp>
         <p:nvSpPr>
-          <p:cNvPr id="28" name="TextBox 27"/>
-          <p:cNvSpPr txBox="1"/>
-          <p:nvPr/>
-        </p:nvSpPr>
-        <p:spPr>
-          <a:xfrm>
-            <a:off x="7575296" y="4819650"/>
-            <a:ext cx="3638804" cy="641350"/>
+          <p:cNvPr id="29" name="TextBox 28"/>
+          <p:cNvSpPr txBox="1"/>
+          <p:nvPr/>
+        </p:nvSpPr>
+        <p:spPr>
+          <a:xfrm>
+            <a:off x="7575296" y="5158317"/>
+            <a:ext cx="3638804" cy="472017"/>
           </a:xfrm>
           <a:prstGeom prst="rect">
             <a:avLst/>
@@ -11810,13 +11995,13 @@
       </p:sp>
       <p:sp>
         <p:nvSpPr>
-          <p:cNvPr id="29" name="Rectangle 28"/>
+          <p:cNvPr id="30" name="Rectangle 29"/>
           <p:cNvSpPr/>
           <p:nvPr/>
         </p:nvSpPr>
         <p:spPr>
           <a:xfrm>
-            <a:off x="812800" y="5397500"/>
+            <a:off x="812800" y="5566833"/>
             <a:ext cx="10566400" cy="7620"/>
           </a:xfrm>
           <a:prstGeom prst="rect">
@@ -11854,14 +12039,14 @@
       </p:sp>
       <p:sp>
         <p:nvSpPr>
-          <p:cNvPr id="30" name="TextBox 29"/>
-          <p:cNvSpPr txBox="1"/>
-          <p:nvPr/>
-        </p:nvSpPr>
-        <p:spPr>
-          <a:xfrm>
-            <a:off x="812800" y="5461000"/>
-            <a:ext cx="1314196" cy="641350"/>
+          <p:cNvPr id="31" name="TextBox 30"/>
+          <p:cNvSpPr txBox="1"/>
+          <p:nvPr/>
+        </p:nvSpPr>
+        <p:spPr>
+          <a:xfrm>
+            <a:off x="812800" y="5630333"/>
+            <a:ext cx="1314196" cy="472017"/>
           </a:xfrm>
           <a:prstGeom prst="rect">
             <a:avLst/>
@@ -11895,14 +12080,14 @@
       </p:sp>
       <p:sp>
         <p:nvSpPr>
-          <p:cNvPr id="31" name="TextBox 30"/>
-          <p:cNvSpPr txBox="1"/>
-          <p:nvPr/>
-        </p:nvSpPr>
-        <p:spPr>
-          <a:xfrm>
-            <a:off x="2292096" y="5461000"/>
-            <a:ext cx="2370836" cy="641350"/>
+          <p:cNvPr id="32" name="TextBox 31"/>
+          <p:cNvSpPr txBox="1"/>
+          <p:nvPr/>
+        </p:nvSpPr>
+        <p:spPr>
+          <a:xfrm>
+            <a:off x="2292096" y="5630333"/>
+            <a:ext cx="2370836" cy="472017"/>
           </a:xfrm>
           <a:prstGeom prst="rect">
             <a:avLst/>
@@ -11936,14 +12121,14 @@
       </p:sp>
       <p:sp>
         <p:nvSpPr>
-          <p:cNvPr id="32" name="TextBox 31"/>
-          <p:cNvSpPr txBox="1"/>
-          <p:nvPr/>
-        </p:nvSpPr>
-        <p:spPr>
-          <a:xfrm>
-            <a:off x="4828032" y="5461000"/>
-            <a:ext cx="2582164" cy="641350"/>
+          <p:cNvPr id="33" name="TextBox 32"/>
+          <p:cNvSpPr txBox="1"/>
+          <p:nvPr/>
+        </p:nvSpPr>
+        <p:spPr>
+          <a:xfrm>
+            <a:off x="4828032" y="5630333"/>
+            <a:ext cx="2582164" cy="472017"/>
           </a:xfrm>
           <a:prstGeom prst="rect">
             <a:avLst/>
@@ -11977,14 +12162,14 @@
       </p:sp>
       <p:sp>
         <p:nvSpPr>
-          <p:cNvPr id="33" name="TextBox 32"/>
-          <p:cNvSpPr txBox="1"/>
-          <p:nvPr/>
-        </p:nvSpPr>
-        <p:spPr>
-          <a:xfrm>
-            <a:off x="7575296" y="5461000"/>
-            <a:ext cx="3638804" cy="641350"/>
+          <p:cNvPr id="34" name="TextBox 33"/>
+          <p:cNvSpPr txBox="1"/>
+          <p:nvPr/>
+        </p:nvSpPr>
+        <p:spPr>
+          <a:xfrm>
+            <a:off x="7575296" y="5630333"/>
+            <a:ext cx="3638804" cy="472017"/>
           </a:xfrm>
           <a:prstGeom prst="rect">
             <a:avLst/>
@@ -22297,17 +22482,54 @@
         </p:blipFill>
         <p:spPr>
           <a:xfrm>
-            <a:off x="812800" y="3200400"/>
-            <a:ext cx="3926460" cy="330200"/>
+            <a:off x="812800" y="3187700"/>
+            <a:ext cx="1897656" cy="292100"/>
           </a:xfrm>
           <a:prstGeom prst="rect">
             <a:avLst/>
           </a:prstGeom>
         </p:spPr>
       </p:pic>
+      <p:sp>
+        <p:nvSpPr>
+          <p:cNvPr id="15" name="TextBox 14"/>
+          <p:cNvSpPr txBox="1"/>
+          <p:nvPr/>
+        </p:nvSpPr>
+        <p:spPr>
+          <a:xfrm>
+            <a:off x="812800" y="3505200"/>
+            <a:ext cx="5029200" cy="127000"/>
+          </a:xfrm>
+          <a:prstGeom prst="rect">
+            <a:avLst/>
+          </a:prstGeom>
+          <a:noFill/>
+        </p:spPr>
+        <p:txBody>
+          <a:bodyPr wrap="square" lIns="0" rIns="0" tIns="0" bIns="0" anchor="t">
+            <a:spAutoFit/>
+          </a:bodyPr>
+          <a:lstStyle/>
+          <a:p>
+            <a:pPr algn="l"/>
+            <a:r>
+              <a:rPr sz="950" b="0">
+                <a:solidFill>
+                  <a:srgbClr val="6B6B6B"/>
+                </a:solidFill>
+                <a:latin typeface="NanumGothic"/>
+                <a:cs typeface="NanumGothic"/>
+                <a:ea typeface="NanumGothic"/>
+              </a:rPr>
+              <a:t>a  그 구간이 받은 어텐션   f(p)  자리가 만드는 몫   g(n)  표기가 만드는 몫</a:t>
+            </a:r>
+          </a:p>
+        </p:txBody>
+      </p:sp>
       <p:pic>
         <p:nvPicPr>
-          <p:cNvPr id="15" name="Picture 14" descr="eq_poscancel.png"/>
+          <p:cNvPr id="16" name="Picture 15" descr="eq_poscancel.png"/>
           <p:cNvPicPr>
             <a:picLocks noChangeAspect="1"/>
           </p:cNvPicPr>
@@ -22321,8 +22543,8 @@
         </p:blipFill>
         <p:spPr>
           <a:xfrm>
-            <a:off x="812800" y="3644900"/>
-            <a:ext cx="3096217" cy="368300"/>
+            <a:off x="812800" y="3695700"/>
+            <a:ext cx="2684670" cy="330200"/>
           </a:xfrm>
           <a:prstGeom prst="rect">
             <a:avLst/>
@@ -22331,13 +22553,13 @@
       </p:pic>
       <p:sp>
         <p:nvSpPr>
-          <p:cNvPr id="16" name="TextBox 15"/>
-          <p:cNvSpPr txBox="1"/>
-          <p:nvPr/>
-        </p:nvSpPr>
-        <p:spPr>
-          <a:xfrm>
-            <a:off x="812800" y="4152900"/>
+          <p:cNvPr id="17" name="TextBox 16"/>
+          <p:cNvSpPr txBox="1"/>
+          <p:nvPr/>
+        </p:nvSpPr>
+        <p:spPr>
+          <a:xfrm>
+            <a:off x="812800" y="4102100"/>
             <a:ext cx="5029200" cy="692662"/>
           </a:xfrm>
           <a:prstGeom prst="rect">
@@ -22372,7 +22594,7 @@
       </p:sp>
       <p:sp>
         <p:nvSpPr>
-          <p:cNvPr id="17" name="Rounded Rectangle 16"/>
+          <p:cNvPr id="18" name="Rounded Rectangle 17"/>
           <p:cNvSpPr/>
           <p:nvPr/>
         </p:nvSpPr>
@@ -22418,7 +22640,7 @@
       </p:sp>
       <p:sp>
         <p:nvSpPr>
-          <p:cNvPr id="18" name="TextBox 17"/>
+          <p:cNvPr id="19" name="TextBox 18"/>
           <p:cNvSpPr txBox="1"/>
           <p:nvPr/>
         </p:nvSpPr>
@@ -22455,7 +22677,7 @@
       </p:sp>
       <p:sp>
         <p:nvSpPr>
-          <p:cNvPr id="19" name="TextBox 18"/>
+          <p:cNvPr id="20" name="TextBox 19"/>
           <p:cNvSpPr txBox="1"/>
           <p:nvPr/>
         </p:nvSpPr>
@@ -22496,7 +22718,7 @@
       </p:sp>
       <p:sp>
         <p:nvSpPr>
-          <p:cNvPr id="20" name="TextBox 19"/>
+          <p:cNvPr id="21" name="TextBox 20"/>
           <p:cNvSpPr txBox="1"/>
           <p:nvPr/>
         </p:nvSpPr>
@@ -22533,7 +22755,7 @@
       </p:sp>
       <p:sp>
         <p:nvSpPr>
-          <p:cNvPr id="21" name="TextBox 20"/>
+          <p:cNvPr id="22" name="TextBox 21"/>
           <p:cNvSpPr txBox="1"/>
           <p:nvPr/>
         </p:nvSpPr>
@@ -22570,7 +22792,7 @@
       </p:sp>
       <p:sp>
         <p:nvSpPr>
-          <p:cNvPr id="22" name="Rectangle 21"/>
+          <p:cNvPr id="23" name="Rectangle 22"/>
           <p:cNvSpPr/>
           <p:nvPr/>
         </p:nvSpPr>
@@ -22614,7 +22836,7 @@
       </p:sp>
       <p:sp>
         <p:nvSpPr>
-          <p:cNvPr id="23" name="TextBox 22"/>
+          <p:cNvPr id="24" name="TextBox 23"/>
           <p:cNvSpPr txBox="1"/>
           <p:nvPr/>
         </p:nvSpPr>
@@ -22655,7 +22877,7 @@
       </p:sp>
       <p:sp>
         <p:nvSpPr>
-          <p:cNvPr id="24" name="TextBox 23"/>
+          <p:cNvPr id="25" name="TextBox 24"/>
           <p:cNvSpPr txBox="1"/>
           <p:nvPr/>
         </p:nvSpPr>
@@ -22696,7 +22918,7 @@
       </p:sp>
       <p:sp>
         <p:nvSpPr>
-          <p:cNvPr id="25" name="Rectangle 24"/>
+          <p:cNvPr id="26" name="Rectangle 25"/>
           <p:cNvSpPr/>
           <p:nvPr/>
         </p:nvSpPr>
@@ -22740,7 +22962,7 @@
       </p:sp>
       <p:sp>
         <p:nvSpPr>
-          <p:cNvPr id="26" name="TextBox 25"/>
+          <p:cNvPr id="27" name="TextBox 26"/>
           <p:cNvSpPr txBox="1"/>
           <p:nvPr/>
         </p:nvSpPr>
@@ -22781,7 +23003,7 @@
       </p:sp>
       <p:sp>
         <p:nvSpPr>
-          <p:cNvPr id="27" name="TextBox 26"/>
+          <p:cNvPr id="28" name="TextBox 27"/>
           <p:cNvSpPr txBox="1"/>
           <p:nvPr/>
         </p:nvSpPr>
@@ -22822,7 +23044,7 @@
       </p:sp>
       <p:sp>
         <p:nvSpPr>
-          <p:cNvPr id="28" name="Rectangle 27"/>
+          <p:cNvPr id="29" name="Rectangle 28"/>
           <p:cNvSpPr/>
           <p:nvPr/>
         </p:nvSpPr>
@@ -22866,7 +23088,7 @@
       </p:sp>
       <p:sp>
         <p:nvSpPr>
-          <p:cNvPr id="29" name="TextBox 28"/>
+          <p:cNvPr id="30" name="TextBox 29"/>
           <p:cNvSpPr txBox="1"/>
           <p:nvPr/>
         </p:nvSpPr>
@@ -22907,7 +23129,7 @@
       </p:sp>
       <p:sp>
         <p:nvSpPr>
-          <p:cNvPr id="30" name="TextBox 29"/>
+          <p:cNvPr id="31" name="TextBox 30"/>
           <p:cNvSpPr txBox="1"/>
           <p:nvPr/>
         </p:nvSpPr>
@@ -22948,7 +23170,7 @@
       </p:sp>
       <p:sp>
         <p:nvSpPr>
-          <p:cNvPr id="31" name="Rectangle 30"/>
+          <p:cNvPr id="32" name="Rectangle 31"/>
           <p:cNvSpPr/>
           <p:nvPr/>
         </p:nvSpPr>
@@ -22992,7 +23214,7 @@
       </p:sp>
       <p:sp>
         <p:nvSpPr>
-          <p:cNvPr id="32" name="TextBox 31"/>
+          <p:cNvPr id="33" name="TextBox 32"/>
           <p:cNvSpPr txBox="1"/>
           <p:nvPr/>
         </p:nvSpPr>
@@ -23033,7 +23255,7 @@
       </p:sp>
       <p:sp>
         <p:nvSpPr>
-          <p:cNvPr id="33" name="TextBox 32"/>
+          <p:cNvPr id="34" name="TextBox 33"/>
           <p:cNvSpPr txBox="1"/>
           <p:nvPr/>
         </p:nvSpPr>
@@ -23074,7 +23296,7 @@
       </p:sp>
       <p:sp>
         <p:nvSpPr>
-          <p:cNvPr id="34" name="TextBox 33"/>
+          <p:cNvPr id="35" name="TextBox 34"/>
           <p:cNvSpPr txBox="1"/>
           <p:nvPr/>
         </p:nvSpPr>
@@ -42828,7 +43050,7 @@
         <p:spPr>
           <a:xfrm>
             <a:off x="6350000" y="2159000"/>
-            <a:ext cx="2215677" cy="368300"/>
+            <a:ext cx="2062872" cy="342900"/>
           </a:xfrm>
           <a:prstGeom prst="rect">
             <a:avLst/>
@@ -42843,7 +43065,44 @@
         </p:nvSpPr>
         <p:spPr>
           <a:xfrm>
-            <a:off x="6350000" y="2641600"/>
+            <a:off x="6350000" y="2540000"/>
+            <a:ext cx="5029200" cy="127000"/>
+          </a:xfrm>
+          <a:prstGeom prst="rect">
+            <a:avLst/>
+          </a:prstGeom>
+          <a:noFill/>
+        </p:spPr>
+        <p:txBody>
+          <a:bodyPr wrap="square" lIns="0" rIns="0" tIns="0" bIns="0" anchor="t">
+            <a:spAutoFit/>
+          </a:bodyPr>
+          <a:lstStyle/>
+          <a:p>
+            <a:pPr algn="l"/>
+            <a:r>
+              <a:rPr sz="950" b="0">
+                <a:solidFill>
+                  <a:srgbClr val="6B6B6B"/>
+                </a:solidFill>
+                <a:latin typeface="NanumGothic"/>
+                <a:cs typeface="NanumGothic"/>
+                <a:ea typeface="NanumGothic"/>
+              </a:rPr>
+              <a:t>ρ  보존율 — 1이면 안 깎임   k̃·ṽ  덮어넣은 값   k·v  원래 값</a:t>
+            </a:r>
+          </a:p>
+        </p:txBody>
+      </p:sp>
+      <p:sp>
+        <p:nvSpPr>
+          <p:cNvPr id="16" name="TextBox 15"/>
+          <p:cNvSpPr txBox="1"/>
+          <p:nvPr/>
+        </p:nvSpPr>
+        <p:spPr>
+          <a:xfrm>
+            <a:off x="6350000" y="2743200"/>
             <a:ext cx="5029200" cy="474475"/>
           </a:xfrm>
           <a:prstGeom prst="rect">
@@ -42878,13 +43137,13 @@
       </p:sp>
       <p:sp>
         <p:nvSpPr>
-          <p:cNvPr id="16" name="TextBox 15"/>
-          <p:cNvSpPr txBox="1"/>
-          <p:nvPr/>
-        </p:nvSpPr>
-        <p:spPr>
-          <a:xfrm>
-            <a:off x="6350000" y="3327400"/>
+          <p:cNvPr id="17" name="TextBox 16"/>
+          <p:cNvSpPr txBox="1"/>
+          <p:nvPr/>
+        </p:nvSpPr>
+        <p:spPr>
+          <a:xfrm>
+            <a:off x="6350000" y="3429000"/>
             <a:ext cx="1408176" cy="114300"/>
           </a:xfrm>
           <a:prstGeom prst="rect">
@@ -42915,13 +43174,13 @@
       </p:sp>
       <p:sp>
         <p:nvSpPr>
-          <p:cNvPr id="17" name="TextBox 16"/>
-          <p:cNvSpPr txBox="1"/>
-          <p:nvPr/>
-        </p:nvSpPr>
-        <p:spPr>
-          <a:xfrm>
-            <a:off x="7758176" y="3327400"/>
+          <p:cNvPr id="18" name="TextBox 17"/>
+          <p:cNvSpPr txBox="1"/>
+          <p:nvPr/>
+        </p:nvSpPr>
+        <p:spPr>
+          <a:xfrm>
+            <a:off x="7758176" y="3429000"/>
             <a:ext cx="1207008" cy="114300"/>
           </a:xfrm>
           <a:prstGeom prst="rect">
@@ -42952,13 +43211,13 @@
       </p:sp>
       <p:sp>
         <p:nvSpPr>
-          <p:cNvPr id="18" name="TextBox 17"/>
-          <p:cNvSpPr txBox="1"/>
-          <p:nvPr/>
-        </p:nvSpPr>
-        <p:spPr>
-          <a:xfrm>
-            <a:off x="8965184" y="3327400"/>
+          <p:cNvPr id="19" name="TextBox 18"/>
+          <p:cNvSpPr txBox="1"/>
+          <p:nvPr/>
+        </p:nvSpPr>
+        <p:spPr>
+          <a:xfrm>
+            <a:off x="8965184" y="3429000"/>
             <a:ext cx="1207008" cy="114300"/>
           </a:xfrm>
           <a:prstGeom prst="rect">
@@ -42989,13 +43248,13 @@
       </p:sp>
       <p:sp>
         <p:nvSpPr>
-          <p:cNvPr id="19" name="TextBox 18"/>
-          <p:cNvSpPr txBox="1"/>
-          <p:nvPr/>
-        </p:nvSpPr>
-        <p:spPr>
-          <a:xfrm>
-            <a:off x="10172192" y="3327400"/>
+          <p:cNvPr id="20" name="TextBox 19"/>
+          <p:cNvSpPr txBox="1"/>
+          <p:nvPr/>
+        </p:nvSpPr>
+        <p:spPr>
+          <a:xfrm>
+            <a:off x="10172192" y="3429000"/>
             <a:ext cx="1207008" cy="114300"/>
           </a:xfrm>
           <a:prstGeom prst="rect">
@@ -43026,13 +43285,13 @@
       </p:sp>
       <p:sp>
         <p:nvSpPr>
-          <p:cNvPr id="20" name="Rectangle 19"/>
+          <p:cNvPr id="21" name="Rectangle 20"/>
           <p:cNvSpPr/>
           <p:nvPr/>
         </p:nvSpPr>
         <p:spPr>
           <a:xfrm>
-            <a:off x="6350000" y="3479800"/>
+            <a:off x="6350000" y="3581400"/>
             <a:ext cx="5029200" cy="7620"/>
           </a:xfrm>
           <a:prstGeom prst="rect">
@@ -43070,14 +43329,14 @@
       </p:sp>
       <p:sp>
         <p:nvSpPr>
-          <p:cNvPr id="21" name="TextBox 20"/>
-          <p:cNvSpPr txBox="1"/>
-          <p:nvPr/>
-        </p:nvSpPr>
-        <p:spPr>
-          <a:xfrm>
-            <a:off x="6350000" y="3581400"/>
-            <a:ext cx="1243076" cy="559141"/>
+          <p:cNvPr id="22" name="TextBox 21"/>
+          <p:cNvSpPr txBox="1"/>
+          <p:nvPr/>
+        </p:nvSpPr>
+        <p:spPr>
+          <a:xfrm>
+            <a:off x="6350000" y="3683000"/>
+            <a:ext cx="1243076" cy="533741"/>
           </a:xfrm>
           <a:prstGeom prst="rect">
             <a:avLst/>
@@ -43111,14 +43370,14 @@
       </p:sp>
       <p:sp>
         <p:nvSpPr>
-          <p:cNvPr id="22" name="TextBox 21"/>
-          <p:cNvSpPr txBox="1"/>
-          <p:nvPr/>
-        </p:nvSpPr>
-        <p:spPr>
-          <a:xfrm>
-            <a:off x="7758176" y="3581400"/>
-            <a:ext cx="1041908" cy="559141"/>
+          <p:cNvPr id="23" name="TextBox 22"/>
+          <p:cNvSpPr txBox="1"/>
+          <p:nvPr/>
+        </p:nvSpPr>
+        <p:spPr>
+          <a:xfrm>
+            <a:off x="7758176" y="3683000"/>
+            <a:ext cx="1041908" cy="533741"/>
           </a:xfrm>
           <a:prstGeom prst="rect">
             <a:avLst/>
@@ -43152,14 +43411,14 @@
       </p:sp>
       <p:sp>
         <p:nvSpPr>
-          <p:cNvPr id="23" name="TextBox 22"/>
-          <p:cNvSpPr txBox="1"/>
-          <p:nvPr/>
-        </p:nvSpPr>
-        <p:spPr>
-          <a:xfrm>
-            <a:off x="8965184" y="3581400"/>
-            <a:ext cx="1041908" cy="559141"/>
+          <p:cNvPr id="24" name="TextBox 23"/>
+          <p:cNvSpPr txBox="1"/>
+          <p:nvPr/>
+        </p:nvSpPr>
+        <p:spPr>
+          <a:xfrm>
+            <a:off x="8965184" y="3683000"/>
+            <a:ext cx="1041908" cy="533741"/>
           </a:xfrm>
           <a:prstGeom prst="rect">
             <a:avLst/>
@@ -43193,14 +43452,14 @@
       </p:sp>
       <p:sp>
         <p:nvSpPr>
-          <p:cNvPr id="24" name="TextBox 23"/>
-          <p:cNvSpPr txBox="1"/>
-          <p:nvPr/>
-        </p:nvSpPr>
-        <p:spPr>
-          <a:xfrm>
-            <a:off x="10172192" y="3581400"/>
-            <a:ext cx="1041908" cy="559141"/>
+          <p:cNvPr id="25" name="TextBox 24"/>
+          <p:cNvSpPr txBox="1"/>
+          <p:nvPr/>
+        </p:nvSpPr>
+        <p:spPr>
+          <a:xfrm>
+            <a:off x="10172192" y="3683000"/>
+            <a:ext cx="1041908" cy="533741"/>
           </a:xfrm>
           <a:prstGeom prst="rect">
             <a:avLst/>
@@ -43234,13 +43493,13 @@
       </p:sp>
       <p:sp>
         <p:nvSpPr>
-          <p:cNvPr id="25" name="Rectangle 24"/>
+          <p:cNvPr id="26" name="Rectangle 25"/>
           <p:cNvSpPr/>
           <p:nvPr/>
         </p:nvSpPr>
         <p:spPr>
           <a:xfrm>
-            <a:off x="6350000" y="4077041"/>
+            <a:off x="6350000" y="4153241"/>
             <a:ext cx="5029200" cy="7620"/>
           </a:xfrm>
           <a:prstGeom prst="rect">
@@ -43278,14 +43537,14 @@
       </p:sp>
       <p:sp>
         <p:nvSpPr>
-          <p:cNvPr id="26" name="TextBox 25"/>
-          <p:cNvSpPr txBox="1"/>
-          <p:nvPr/>
-        </p:nvSpPr>
-        <p:spPr>
-          <a:xfrm>
-            <a:off x="6350000" y="4140541"/>
-            <a:ext cx="1243076" cy="559141"/>
+          <p:cNvPr id="27" name="TextBox 26"/>
+          <p:cNvSpPr txBox="1"/>
+          <p:nvPr/>
+        </p:nvSpPr>
+        <p:spPr>
+          <a:xfrm>
+            <a:off x="6350000" y="4216741"/>
+            <a:ext cx="1243076" cy="533741"/>
           </a:xfrm>
           <a:prstGeom prst="rect">
             <a:avLst/>
@@ -43319,14 +43578,14 @@
       </p:sp>
       <p:sp>
         <p:nvSpPr>
-          <p:cNvPr id="27" name="TextBox 26"/>
-          <p:cNvSpPr txBox="1"/>
-          <p:nvPr/>
-        </p:nvSpPr>
-        <p:spPr>
-          <a:xfrm>
-            <a:off x="7758176" y="4140541"/>
-            <a:ext cx="1041908" cy="559141"/>
+          <p:cNvPr id="28" name="TextBox 27"/>
+          <p:cNvSpPr txBox="1"/>
+          <p:nvPr/>
+        </p:nvSpPr>
+        <p:spPr>
+          <a:xfrm>
+            <a:off x="7758176" y="4216741"/>
+            <a:ext cx="1041908" cy="533741"/>
           </a:xfrm>
           <a:prstGeom prst="rect">
             <a:avLst/>
@@ -43360,14 +43619,14 @@
       </p:sp>
       <p:sp>
         <p:nvSpPr>
-          <p:cNvPr id="28" name="TextBox 27"/>
-          <p:cNvSpPr txBox="1"/>
-          <p:nvPr/>
-        </p:nvSpPr>
-        <p:spPr>
-          <a:xfrm>
-            <a:off x="8965184" y="4140541"/>
-            <a:ext cx="1041908" cy="559141"/>
+          <p:cNvPr id="29" name="TextBox 28"/>
+          <p:cNvSpPr txBox="1"/>
+          <p:nvPr/>
+        </p:nvSpPr>
+        <p:spPr>
+          <a:xfrm>
+            <a:off x="8965184" y="4216741"/>
+            <a:ext cx="1041908" cy="533741"/>
           </a:xfrm>
           <a:prstGeom prst="rect">
             <a:avLst/>
@@ -43401,14 +43660,14 @@
       </p:sp>
       <p:sp>
         <p:nvSpPr>
-          <p:cNvPr id="29" name="TextBox 28"/>
-          <p:cNvSpPr txBox="1"/>
-          <p:nvPr/>
-        </p:nvSpPr>
-        <p:spPr>
-          <a:xfrm>
-            <a:off x="10172192" y="4140541"/>
-            <a:ext cx="1041908" cy="559141"/>
+          <p:cNvPr id="30" name="TextBox 29"/>
+          <p:cNvSpPr txBox="1"/>
+          <p:nvPr/>
+        </p:nvSpPr>
+        <p:spPr>
+          <a:xfrm>
+            <a:off x="10172192" y="4216741"/>
+            <a:ext cx="1041908" cy="533741"/>
           </a:xfrm>
           <a:prstGeom prst="rect">
             <a:avLst/>
@@ -43442,13 +43701,13 @@
       </p:sp>
       <p:sp>
         <p:nvSpPr>
-          <p:cNvPr id="30" name="Rectangle 29"/>
+          <p:cNvPr id="31" name="Rectangle 30"/>
           <p:cNvSpPr/>
           <p:nvPr/>
         </p:nvSpPr>
         <p:spPr>
           <a:xfrm>
-            <a:off x="6350000" y="4636183"/>
+            <a:off x="6350000" y="4686983"/>
             <a:ext cx="5029200" cy="7620"/>
           </a:xfrm>
           <a:prstGeom prst="rect">
@@ -43486,14 +43745,14 @@
       </p:sp>
       <p:sp>
         <p:nvSpPr>
-          <p:cNvPr id="31" name="TextBox 30"/>
-          <p:cNvSpPr txBox="1"/>
-          <p:nvPr/>
-        </p:nvSpPr>
-        <p:spPr>
-          <a:xfrm>
-            <a:off x="6350000" y="4699683"/>
-            <a:ext cx="1243076" cy="559141"/>
+          <p:cNvPr id="32" name="TextBox 31"/>
+          <p:cNvSpPr txBox="1"/>
+          <p:nvPr/>
+        </p:nvSpPr>
+        <p:spPr>
+          <a:xfrm>
+            <a:off x="6350000" y="4750483"/>
+            <a:ext cx="1243076" cy="533741"/>
           </a:xfrm>
           <a:prstGeom prst="rect">
             <a:avLst/>
@@ -43527,14 +43786,14 @@
       </p:sp>
       <p:sp>
         <p:nvSpPr>
-          <p:cNvPr id="32" name="TextBox 31"/>
-          <p:cNvSpPr txBox="1"/>
-          <p:nvPr/>
-        </p:nvSpPr>
-        <p:spPr>
-          <a:xfrm>
-            <a:off x="7758176" y="4699683"/>
-            <a:ext cx="1041908" cy="559141"/>
+          <p:cNvPr id="33" name="TextBox 32"/>
+          <p:cNvSpPr txBox="1"/>
+          <p:nvPr/>
+        </p:nvSpPr>
+        <p:spPr>
+          <a:xfrm>
+            <a:off x="7758176" y="4750483"/>
+            <a:ext cx="1041908" cy="533741"/>
           </a:xfrm>
           <a:prstGeom prst="rect">
             <a:avLst/>
@@ -43568,14 +43827,14 @@
       </p:sp>
       <p:sp>
         <p:nvSpPr>
-          <p:cNvPr id="33" name="TextBox 32"/>
-          <p:cNvSpPr txBox="1"/>
-          <p:nvPr/>
-        </p:nvSpPr>
-        <p:spPr>
-          <a:xfrm>
-            <a:off x="8965184" y="4699683"/>
-            <a:ext cx="1041908" cy="559141"/>
+          <p:cNvPr id="34" name="TextBox 33"/>
+          <p:cNvSpPr txBox="1"/>
+          <p:nvPr/>
+        </p:nvSpPr>
+        <p:spPr>
+          <a:xfrm>
+            <a:off x="8965184" y="4750483"/>
+            <a:ext cx="1041908" cy="533741"/>
           </a:xfrm>
           <a:prstGeom prst="rect">
             <a:avLst/>
@@ -43609,14 +43868,14 @@
       </p:sp>
       <p:sp>
         <p:nvSpPr>
-          <p:cNvPr id="34" name="TextBox 33"/>
-          <p:cNvSpPr txBox="1"/>
-          <p:nvPr/>
-        </p:nvSpPr>
-        <p:spPr>
-          <a:xfrm>
-            <a:off x="10172192" y="4699683"/>
-            <a:ext cx="1041908" cy="559141"/>
+          <p:cNvPr id="35" name="TextBox 34"/>
+          <p:cNvSpPr txBox="1"/>
+          <p:nvPr/>
+        </p:nvSpPr>
+        <p:spPr>
+          <a:xfrm>
+            <a:off x="10172192" y="4750483"/>
+            <a:ext cx="1041908" cy="533741"/>
           </a:xfrm>
           <a:prstGeom prst="rect">
             <a:avLst/>
@@ -43650,13 +43909,13 @@
       </p:sp>
       <p:sp>
         <p:nvSpPr>
-          <p:cNvPr id="35" name="Rectangle 34"/>
+          <p:cNvPr id="36" name="Rectangle 35"/>
           <p:cNvSpPr/>
           <p:nvPr/>
         </p:nvSpPr>
         <p:spPr>
           <a:xfrm>
-            <a:off x="6350000" y="5195324"/>
+            <a:off x="6350000" y="5220724"/>
             <a:ext cx="5029200" cy="7620"/>
           </a:xfrm>
           <a:prstGeom prst="rect">
@@ -43694,14 +43953,14 @@
       </p:sp>
       <p:sp>
         <p:nvSpPr>
-          <p:cNvPr id="36" name="TextBox 35"/>
-          <p:cNvSpPr txBox="1"/>
-          <p:nvPr/>
-        </p:nvSpPr>
-        <p:spPr>
-          <a:xfrm>
-            <a:off x="6350000" y="5258824"/>
-            <a:ext cx="1243076" cy="559141"/>
+          <p:cNvPr id="37" name="TextBox 36"/>
+          <p:cNvSpPr txBox="1"/>
+          <p:nvPr/>
+        </p:nvSpPr>
+        <p:spPr>
+          <a:xfrm>
+            <a:off x="6350000" y="5284224"/>
+            <a:ext cx="1243076" cy="533741"/>
           </a:xfrm>
           <a:prstGeom prst="rect">
             <a:avLst/>
@@ -43735,14 +43994,14 @@
       </p:sp>
       <p:sp>
         <p:nvSpPr>
-          <p:cNvPr id="37" name="TextBox 36"/>
-          <p:cNvSpPr txBox="1"/>
-          <p:nvPr/>
-        </p:nvSpPr>
-        <p:spPr>
-          <a:xfrm>
-            <a:off x="7758176" y="5258824"/>
-            <a:ext cx="1041908" cy="559141"/>
+          <p:cNvPr id="38" name="TextBox 37"/>
+          <p:cNvSpPr txBox="1"/>
+          <p:nvPr/>
+        </p:nvSpPr>
+        <p:spPr>
+          <a:xfrm>
+            <a:off x="7758176" y="5284224"/>
+            <a:ext cx="1041908" cy="533741"/>
           </a:xfrm>
           <a:prstGeom prst="rect">
             <a:avLst/>
@@ -43776,14 +44035,14 @@
       </p:sp>
       <p:sp>
         <p:nvSpPr>
-          <p:cNvPr id="38" name="TextBox 37"/>
-          <p:cNvSpPr txBox="1"/>
-          <p:nvPr/>
-        </p:nvSpPr>
-        <p:spPr>
-          <a:xfrm>
-            <a:off x="8965184" y="5258824"/>
-            <a:ext cx="1041908" cy="559141"/>
+          <p:cNvPr id="39" name="TextBox 38"/>
+          <p:cNvSpPr txBox="1"/>
+          <p:nvPr/>
+        </p:nvSpPr>
+        <p:spPr>
+          <a:xfrm>
+            <a:off x="8965184" y="5284224"/>
+            <a:ext cx="1041908" cy="533741"/>
           </a:xfrm>
           <a:prstGeom prst="rect">
             <a:avLst/>
@@ -43817,14 +44076,14 @@
       </p:sp>
       <p:sp>
         <p:nvSpPr>
-          <p:cNvPr id="39" name="TextBox 38"/>
-          <p:cNvSpPr txBox="1"/>
-          <p:nvPr/>
-        </p:nvSpPr>
-        <p:spPr>
-          <a:xfrm>
-            <a:off x="10172192" y="5258824"/>
-            <a:ext cx="1041908" cy="559141"/>
+          <p:cNvPr id="40" name="TextBox 39"/>
+          <p:cNvSpPr txBox="1"/>
+          <p:nvPr/>
+        </p:nvSpPr>
+        <p:spPr>
+          <a:xfrm>
+            <a:off x="10172192" y="5284224"/>
+            <a:ext cx="1041908" cy="533741"/>
           </a:xfrm>
           <a:prstGeom prst="rect">
             <a:avLst/>
@@ -45248,7 +45507,7 @@
         <p:spPr>
           <a:xfrm>
             <a:off x="6350000" y="2286000"/>
-            <a:ext cx="4302583" cy="355600"/>
+            <a:ext cx="3553434" cy="317500"/>
           </a:xfrm>
           <a:prstGeom prst="rect">
             <a:avLst/>
@@ -45263,7 +45522,44 @@
         </p:nvSpPr>
         <p:spPr>
           <a:xfrm>
-            <a:off x="6350000" y="2730500"/>
+            <a:off x="6350000" y="2641600"/>
+            <a:ext cx="5029200" cy="127000"/>
+          </a:xfrm>
+          <a:prstGeom prst="rect">
+            <a:avLst/>
+          </a:prstGeom>
+          <a:noFill/>
+        </p:spPr>
+        <p:txBody>
+          <a:bodyPr wrap="square" lIns="0" rIns="0" tIns="0" bIns="0" anchor="t">
+            <a:spAutoFit/>
+          </a:bodyPr>
+          <a:lstStyle/>
+          <a:p>
+            <a:pPr algn="l"/>
+            <a:r>
+              <a:rPr sz="950" b="0">
+                <a:solidFill>
+                  <a:srgbClr val="6B6B6B"/>
+                </a:solidFill>
+                <a:latin typeface="NanumGothic"/>
+                <a:cs typeface="NanumGothic"/>
+                <a:ea typeface="NanumGothic"/>
+              </a:rPr>
+              <a:t>h⁺  camel 이름 토큰   h⁻  snake 이름 토큰   α  조향 세기</a:t>
+            </a:r>
+          </a:p>
+        </p:txBody>
+      </p:sp>
+      <p:sp>
+        <p:nvSpPr>
+          <p:cNvPr id="17" name="TextBox 16"/>
+          <p:cNvSpPr txBox="1"/>
+          <p:nvPr/>
+        </p:nvSpPr>
+        <p:spPr>
+          <a:xfrm>
+            <a:off x="6350000" y="2832100"/>
             <a:ext cx="5029200" cy="474475"/>
           </a:xfrm>
           <a:prstGeom prst="rect">
@@ -45298,13 +45594,13 @@
       </p:sp>
       <p:sp>
         <p:nvSpPr>
-          <p:cNvPr id="17" name="TextBox 16"/>
-          <p:cNvSpPr txBox="1"/>
-          <p:nvPr/>
-        </p:nvSpPr>
-        <p:spPr>
-          <a:xfrm>
-            <a:off x="6350000" y="3420875"/>
+          <p:cNvPr id="18" name="TextBox 17"/>
+          <p:cNvSpPr txBox="1"/>
+          <p:nvPr/>
+        </p:nvSpPr>
+        <p:spPr>
+          <a:xfrm>
+            <a:off x="6350000" y="3497075"/>
             <a:ext cx="5080000" cy="101600"/>
           </a:xfrm>
           <a:prstGeom prst="rect">
@@ -45335,7 +45631,7 @@
       </p:sp>
       <p:pic>
         <p:nvPicPr>
-          <p:cNvPr id="18" name="Picture 17" descr="eq_spot2.png"/>
+          <p:cNvPr id="19" name="Picture 18" descr="eq_spot2.png"/>
           <p:cNvPicPr>
             <a:picLocks noChangeAspect="1"/>
           </p:cNvPicPr>
@@ -45349,8 +45645,8 @@
         </p:blipFill>
         <p:spPr>
           <a:xfrm>
-            <a:off x="6350000" y="3585975"/>
-            <a:ext cx="2322363" cy="469900"/>
+            <a:off x="6350000" y="3662175"/>
+            <a:ext cx="1703421" cy="406400"/>
           </a:xfrm>
           <a:prstGeom prst="rect">
             <a:avLst/>
@@ -45359,13 +45655,50 @@
       </p:pic>
       <p:sp>
         <p:nvSpPr>
-          <p:cNvPr id="19" name="TextBox 18"/>
-          <p:cNvSpPr txBox="1"/>
-          <p:nvPr/>
-        </p:nvSpPr>
-        <p:spPr>
-          <a:xfrm>
-            <a:off x="6350000" y="4170175"/>
+          <p:cNvPr id="20" name="TextBox 19"/>
+          <p:cNvSpPr txBox="1"/>
+          <p:nvPr/>
+        </p:nvSpPr>
+        <p:spPr>
+          <a:xfrm>
+            <a:off x="6350000" y="4106675"/>
+            <a:ext cx="5029200" cy="127000"/>
+          </a:xfrm>
+          <a:prstGeom prst="rect">
+            <a:avLst/>
+          </a:prstGeom>
+          <a:noFill/>
+        </p:spPr>
+        <p:txBody>
+          <a:bodyPr wrap="square" lIns="0" rIns="0" tIns="0" bIns="0" anchor="t">
+            <a:spAutoFit/>
+          </a:bodyPr>
+          <a:lstStyle/>
+          <a:p>
+            <a:pPr algn="l"/>
+            <a:r>
+              <a:rPr sz="950" b="0">
+                <a:solidFill>
+                  <a:srgbClr val="6B6B6B"/>
+                </a:solidFill>
+                <a:latin typeface="NanumGothic"/>
+                <a:cs typeface="NanumGothic"/>
+                <a:ea typeface="NanumGothic"/>
+              </a:rPr>
+              <a:t>ψ  개입 전 비중   ψ*  목표 비중   S  지침 스팬   p  어텐션 한 행</a:t>
+            </a:r>
+          </a:p>
+        </p:txBody>
+      </p:sp>
+      <p:sp>
+        <p:nvSpPr>
+          <p:cNvPr id="21" name="TextBox 20"/>
+          <p:cNvSpPr txBox="1"/>
+          <p:nvPr/>
+        </p:nvSpPr>
+        <p:spPr>
+          <a:xfrm>
+            <a:off x="6350000" y="4309875"/>
             <a:ext cx="5029200" cy="474475"/>
           </a:xfrm>
           <a:prstGeom prst="rect">
@@ -47735,7 +48068,7 @@
       </p:sp>
       <p:pic>
         <p:nvPicPr>
-          <p:cNvPr id="14" name="Picture 13" descr="eq_realcompl.png"/>
+          <p:cNvPr id="14" name="Picture 13" descr="eq_compl2.png"/>
           <p:cNvPicPr>
             <a:picLocks noChangeAspect="1"/>
           </p:cNvPicPr>
@@ -47750,7 +48083,7 @@
         <p:spPr>
           <a:xfrm>
             <a:off x="6350000" y="2159000"/>
-            <a:ext cx="4062186" cy="266700"/>
+            <a:ext cx="2430130" cy="279400"/>
           </a:xfrm>
           <a:prstGeom prst="rect">
             <a:avLst/>
@@ -47759,13 +48092,50 @@
       </p:pic>
       <p:sp>
         <p:nvSpPr>
-          <p:cNvPr id="15" name="Rounded Rectangle 14"/>
+          <p:cNvPr id="15" name="TextBox 14"/>
+          <p:cNvSpPr txBox="1"/>
+          <p:nvPr/>
+        </p:nvSpPr>
+        <p:spPr>
+          <a:xfrm>
+            <a:off x="6350000" y="2476500"/>
+            <a:ext cx="5029200" cy="127000"/>
+          </a:xfrm>
+          <a:prstGeom prst="rect">
+            <a:avLst/>
+          </a:prstGeom>
+          <a:noFill/>
+        </p:spPr>
+        <p:txBody>
+          <a:bodyPr wrap="square" lIns="0" rIns="0" tIns="0" bIns="0" anchor="t">
+            <a:spAutoFit/>
+          </a:bodyPr>
+          <a:lstStyle/>
+          <a:p>
+            <a:pPr algn="l"/>
+            <a:r>
+              <a:rPr sz="950" b="0">
+                <a:solidFill>
+                  <a:srgbClr val="6B6B6B"/>
+                </a:solidFill>
+                <a:latin typeface="NanumGothic"/>
+                <a:cs typeface="NanumGothic"/>
+                <a:ea typeface="NanumGothic"/>
+              </a:rPr>
+              <a:t>c  진짜 준수   n  표기가 맞으면 1   t  과제가 맞으면 1</a:t>
+            </a:r>
+          </a:p>
+        </p:txBody>
+      </p:sp>
+      <p:sp>
+        <p:nvSpPr>
+          <p:cNvPr id="16" name="Rounded Rectangle 15"/>
           <p:cNvSpPr/>
           <p:nvPr/>
         </p:nvSpPr>
         <p:spPr>
           <a:xfrm>
-            <a:off x="6350000" y="2540000"/>
+            <a:off x="6350000" y="2705100"/>
             <a:ext cx="5029200" cy="825500"/>
           </a:xfrm>
           <a:prstGeom prst="roundRect">
@@ -47805,13 +48175,13 @@
       </p:sp>
       <p:sp>
         <p:nvSpPr>
-          <p:cNvPr id="16" name="TextBox 15"/>
-          <p:cNvSpPr txBox="1"/>
-          <p:nvPr/>
-        </p:nvSpPr>
-        <p:spPr>
-          <a:xfrm>
-            <a:off x="6464300" y="2628900"/>
+          <p:cNvPr id="17" name="TextBox 16"/>
+          <p:cNvSpPr txBox="1"/>
+          <p:nvPr/>
+        </p:nvSpPr>
+        <p:spPr>
+          <a:xfrm>
+            <a:off x="6464300" y="2794000"/>
             <a:ext cx="4800600" cy="128905"/>
           </a:xfrm>
           <a:prstGeom prst="rect">
@@ -47842,13 +48212,13 @@
       </p:sp>
       <p:sp>
         <p:nvSpPr>
-          <p:cNvPr id="17" name="TextBox 16"/>
-          <p:cNvSpPr txBox="1"/>
-          <p:nvPr/>
-        </p:nvSpPr>
-        <p:spPr>
-          <a:xfrm>
-            <a:off x="6464300" y="2757805"/>
+          <p:cNvPr id="18" name="TextBox 17"/>
+          <p:cNvSpPr txBox="1"/>
+          <p:nvPr/>
+        </p:nvSpPr>
+        <p:spPr>
+          <a:xfrm>
+            <a:off x="6464300" y="2922905"/>
             <a:ext cx="4800600" cy="128905"/>
           </a:xfrm>
           <a:prstGeom prst="rect">
@@ -47879,13 +48249,13 @@
       </p:sp>
       <p:sp>
         <p:nvSpPr>
-          <p:cNvPr id="18" name="TextBox 17"/>
-          <p:cNvSpPr txBox="1"/>
-          <p:nvPr/>
-        </p:nvSpPr>
-        <p:spPr>
-          <a:xfrm>
-            <a:off x="6464300" y="2886710"/>
+          <p:cNvPr id="19" name="TextBox 18"/>
+          <p:cNvSpPr txBox="1"/>
+          <p:nvPr/>
+        </p:nvSpPr>
+        <p:spPr>
+          <a:xfrm>
+            <a:off x="6464300" y="3051810"/>
             <a:ext cx="4800600" cy="128905"/>
           </a:xfrm>
           <a:prstGeom prst="rect">
@@ -47916,13 +48286,13 @@
       </p:sp>
       <p:sp>
         <p:nvSpPr>
-          <p:cNvPr id="19" name="TextBox 18"/>
-          <p:cNvSpPr txBox="1"/>
-          <p:nvPr/>
-        </p:nvSpPr>
-        <p:spPr>
-          <a:xfrm>
-            <a:off x="6464300" y="3015615"/>
+          <p:cNvPr id="20" name="TextBox 19"/>
+          <p:cNvSpPr txBox="1"/>
+          <p:nvPr/>
+        </p:nvSpPr>
+        <p:spPr>
+          <a:xfrm>
+            <a:off x="6464300" y="3180715"/>
             <a:ext cx="4800600" cy="128905"/>
           </a:xfrm>
           <a:prstGeom prst="rect">
@@ -47953,13 +48323,13 @@
       </p:sp>
       <p:sp>
         <p:nvSpPr>
-          <p:cNvPr id="20" name="TextBox 19"/>
-          <p:cNvSpPr txBox="1"/>
-          <p:nvPr/>
-        </p:nvSpPr>
-        <p:spPr>
-          <a:xfrm>
-            <a:off x="6464300" y="3144520"/>
+          <p:cNvPr id="21" name="TextBox 20"/>
+          <p:cNvSpPr txBox="1"/>
+          <p:nvPr/>
+        </p:nvSpPr>
+        <p:spPr>
+          <a:xfrm>
+            <a:off x="6464300" y="3309620"/>
             <a:ext cx="4800600" cy="128905"/>
           </a:xfrm>
           <a:prstGeom prst="rect">
@@ -47990,13 +48360,13 @@
       </p:sp>
       <p:sp>
         <p:nvSpPr>
-          <p:cNvPr id="21" name="TextBox 20"/>
-          <p:cNvSpPr txBox="1"/>
-          <p:nvPr/>
-        </p:nvSpPr>
-        <p:spPr>
-          <a:xfrm>
-            <a:off x="6350000" y="3492500"/>
+          <p:cNvPr id="22" name="TextBox 21"/>
+          <p:cNvSpPr txBox="1"/>
+          <p:nvPr/>
+        </p:nvSpPr>
+        <p:spPr>
+          <a:xfrm>
+            <a:off x="6350000" y="3657600"/>
             <a:ext cx="5029200" cy="910849"/>
           </a:xfrm>
           <a:prstGeom prst="rect">
@@ -51760,7 +52130,7 @@
       </p:sp>
       <p:pic>
         <p:nvPicPr>
-          <p:cNvPr id="15" name="Picture 14" descr="eq_output.png"/>
+          <p:cNvPr id="15" name="Picture 14" descr="eq_output2.png"/>
           <p:cNvPicPr>
             <a:picLocks noChangeAspect="1"/>
           </p:cNvPicPr>
@@ -51775,7 +52145,7 @@
         <p:spPr>
           <a:xfrm>
             <a:off x="6350000" y="3009900"/>
-            <a:ext cx="2239968" cy="342900"/>
+            <a:ext cx="1726203" cy="317500"/>
           </a:xfrm>
           <a:prstGeom prst="rect">
             <a:avLst/>
@@ -51790,7 +52160,44 @@
         </p:nvSpPr>
         <p:spPr>
           <a:xfrm>
-            <a:off x="6350000" y="3467100"/>
+            <a:off x="6350000" y="3365500"/>
+            <a:ext cx="5029200" cy="127000"/>
+          </a:xfrm>
+          <a:prstGeom prst="rect">
+            <a:avLst/>
+          </a:prstGeom>
+          <a:noFill/>
+        </p:spPr>
+        <p:txBody>
+          <a:bodyPr wrap="square" lIns="0" rIns="0" tIns="0" bIns="0" anchor="t">
+            <a:spAutoFit/>
+          </a:bodyPr>
+          <a:lstStyle/>
+          <a:p>
+            <a:pPr algn="l"/>
+            <a:r>
+              <a:rPr sz="950" b="0">
+                <a:solidFill>
+                  <a:srgbClr val="6B6B6B"/>
+                </a:solidFill>
+                <a:latin typeface="NanumGothic"/>
+                <a:cs typeface="NanumGothic"/>
+                <a:ea typeface="NanumGothic"/>
+              </a:rPr>
+              <a:t>o  다음 층으로 나가는 것   a  얼마나 보나   v  무엇이 실려 오나</a:t>
+            </a:r>
+          </a:p>
+        </p:txBody>
+      </p:sp>
+      <p:sp>
+        <p:nvSpPr>
+          <p:cNvPr id="17" name="TextBox 16"/>
+          <p:cNvSpPr txBox="1"/>
+          <p:nvPr/>
+        </p:nvSpPr>
+        <p:spPr>
+          <a:xfrm>
+            <a:off x="6350000" y="3568700"/>
             <a:ext cx="5029200" cy="723831"/>
           </a:xfrm>
           <a:prstGeom prst="rect">
@@ -51825,13 +52232,13 @@
       </p:sp>
       <p:sp>
         <p:nvSpPr>
-          <p:cNvPr id="17" name="TextBox 16"/>
-          <p:cNvSpPr txBox="1"/>
-          <p:nvPr/>
-        </p:nvSpPr>
-        <p:spPr>
-          <a:xfrm>
-            <a:off x="6350000" y="4000500"/>
+          <p:cNvPr id="18" name="TextBox 17"/>
+          <p:cNvSpPr txBox="1"/>
+          <p:nvPr/>
+        </p:nvSpPr>
+        <p:spPr>
+          <a:xfrm>
+            <a:off x="6350000" y="4102100"/>
             <a:ext cx="5029200" cy="723831"/>
           </a:xfrm>
           <a:prstGeom prst="rect">
@@ -64226,14 +64633,51 @@
         </p:blipFill>
         <p:spPr>
           <a:xfrm>
-            <a:off x="6350000" y="5348065"/>
-            <a:ext cx="1388816" cy="355600"/>
+            <a:off x="6350000" y="5182965"/>
+            <a:ext cx="1125855" cy="342900"/>
           </a:xfrm>
           <a:prstGeom prst="rect">
             <a:avLst/>
           </a:prstGeom>
         </p:spPr>
       </p:pic>
+      <p:sp>
+        <p:nvSpPr>
+          <p:cNvPr id="38" name="TextBox 37"/>
+          <p:cNvSpPr txBox="1"/>
+          <p:nvPr/>
+        </p:nvSpPr>
+        <p:spPr>
+          <a:xfrm>
+            <a:off x="6350000" y="5576665"/>
+            <a:ext cx="5029200" cy="127000"/>
+          </a:xfrm>
+          <a:prstGeom prst="rect">
+            <a:avLst/>
+          </a:prstGeom>
+          <a:noFill/>
+        </p:spPr>
+        <p:txBody>
+          <a:bodyPr wrap="square" lIns="0" rIns="0" tIns="0" bIns="0" anchor="t">
+            <a:spAutoFit/>
+          </a:bodyPr>
+          <a:lstStyle/>
+          <a:p>
+            <a:pPr algn="l"/>
+            <a:r>
+              <a:rPr sz="950" b="0">
+                <a:solidFill>
+                  <a:srgbClr val="6B6B6B"/>
+                </a:solidFill>
+                <a:latin typeface="NanumGothic"/>
+                <a:cs typeface="NanumGothic"/>
+                <a:ea typeface="NanumGothic"/>
+              </a:rPr>
+              <a:t>R  처치 — 표기를 바꿔 넣은 것   R′  통제 — 표기 정보 없이 덮기만 한 것   b  묶음 번호</a:t>
+            </a:r>
+          </a:p>
+        </p:txBody>
+      </p:sp>
     </p:spTree>
   </p:cSld>
   <p:clrMapOvr>
